--- a/note/presentations/icecal_related_work_ppt.pptx
+++ b/note/presentations/icecal_related_work_ppt.pptx
@@ -108,6 +108,11 @@
       </a:defRPr>
     </a:lvl9pPr>
   </p:defaultTextStyle>
+  <p:extLst>
+    <p:ext uri="{EFAFB233-063F-42B5-8137-9DF3F51BA10A}">
+      <p15:sldGuideLst xmlns:p15="http://schemas.microsoft.com/office/powerpoint/2012/main"/>
+    </p:ext>
+  </p:extLst>
 </p:presentation>
 </file>
 
@@ -326,9 +331,7 @@
           <a:bodyPr/>
           <a:lstStyle/>
           <a:p>
-            <a:r>
-              <a:t>开场只说一句：ICE-Cal 不重新学习机器人要做什么，只校准它怎样把既定意图做出来。</a:t>
-            </a:r>
+            <a:endParaRPr dirty="0"/>
           </a:p>
         </p:txBody>
       </p:sp>
@@ -421,9 +424,7 @@
           <a:bodyPr/>
           <a:lstStyle/>
           <a:p>
-            <a:r>
-              <a:t>开场只说一句：ICE-Cal 不重新学习机器人要做什么，只校准它怎样把既定意图做出来。</a:t>
-            </a:r>
+            <a:endParaRPr dirty="0"/>
           </a:p>
         </p:txBody>
       </p:sp>

--- a/note/presentations/icecal_related_work_ppt.pptx
+++ b/note/presentations/icecal_related_work_ppt.pptx
@@ -5,11 +5,15 @@
     <p:sldMasterId id="2147483648" r:id="rId1"/>
   </p:sldMasterIdLst>
   <p:notesMasterIdLst>
-    <p:notesMasterId r:id="rId4"/>
+    <p:notesMasterId r:id="rId8"/>
   </p:notesMasterIdLst>
   <p:sldIdLst>
-    <p:sldId id="256" r:id="rId2"/>
-    <p:sldId id="257" r:id="rId3"/>
+    <p:sldId id="258" r:id="rId2"/>
+    <p:sldId id="256" r:id="rId3"/>
+    <p:sldId id="332" r:id="rId4"/>
+    <p:sldId id="434" r:id="rId5"/>
+    <p:sldId id="446" r:id="rId6"/>
+    <p:sldId id="447" r:id="rId7"/>
   </p:sldIdLst>
   <p:sldSz cx="12192000" cy="6858000"/>
   <p:notesSz cx="6858000" cy="9144000"/>
@@ -292,85 +296,10 @@
   <p:cSld>
     <p:spTree>
       <p:nvGrpSpPr>
-        <p:cNvPr id="1" name=""/>
-        <p:cNvGrpSpPr/>
-        <p:nvPr/>
-      </p:nvGrpSpPr>
-      <p:grpSpPr>
-        <a:xfrm>
-          <a:off x="0" y="0"/>
-          <a:ext cx="0" cy="0"/>
-          <a:chOff x="0" y="0"/>
-          <a:chExt cx="0" cy="0"/>
-        </a:xfrm>
-      </p:grpSpPr>
-      <p:sp>
-        <p:nvSpPr>
-          <p:cNvPr id="2" name="Slide Image Placeholder 1"/>
-          <p:cNvSpPr>
-            <a:spLocks noGrp="1" noRot="1" noChangeAspect="1"/>
-          </p:cNvSpPr>
-          <p:nvPr>
-            <p:ph type="sldImg"/>
-          </p:nvPr>
-        </p:nvSpPr>
-        <p:spPr/>
-      </p:sp>
-      <p:sp>
-        <p:nvSpPr>
-          <p:cNvPr id="3" name="Notes Placeholder 2"/>
-          <p:cNvSpPr>
-            <a:spLocks noGrp="1"/>
-          </p:cNvSpPr>
-          <p:nvPr>
-            <p:ph type="body" idx="1"/>
-          </p:nvPr>
-        </p:nvSpPr>
-        <p:spPr/>
-        <p:txBody>
-          <a:bodyPr/>
-          <a:lstStyle/>
-          <a:p>
-            <a:endParaRPr dirty="0"/>
-          </a:p>
-        </p:txBody>
-      </p:sp>
-      <p:sp>
-        <p:nvSpPr>
-          <p:cNvPr id="4" name="Slide Number Placeholder 3"/>
-          <p:cNvSpPr>
-            <a:spLocks noGrp="1"/>
-          </p:cNvSpPr>
-          <p:nvPr>
-            <p:ph type="sldNum" idx="5"/>
-          </p:nvPr>
-        </p:nvSpPr>
-        <p:spPr/>
-        <p:txBody>
-          <a:bodyPr/>
-          <a:lstStyle/>
-          <a:p>
-            <a:endParaRPr/>
-          </a:p>
-        </p:txBody>
-      </p:sp>
-    </p:spTree>
-  </p:cSld>
-  <p:clrMapOvr>
-    <a:masterClrMapping/>
-  </p:clrMapOvr>
-</p:notes>
-</file>
-
-<file path=ppt/notesSlides/notesSlide2.xml><?xml version="1.0" encoding="utf-8"?>
-<p:notes xmlns:a="http://schemas.openxmlformats.org/drawingml/2006/main" xmlns:r="http://schemas.openxmlformats.org/officeDocument/2006/relationships" xmlns:p="http://schemas.openxmlformats.org/presentationml/2006/main">
-  <p:cSld>
-    <p:spTree>
-      <p:nvGrpSpPr>
         <p:cNvPr id="1" name="">
           <a:extLst>
             <a:ext uri="{FF2B5EF4-FFF2-40B4-BE49-F238E27FC236}">
-              <a16:creationId xmlns:a16="http://schemas.microsoft.com/office/drawing/2014/main" id="{468D38DC-A972-60C5-F62C-F9738027CFC4}"/>
+              <a16:creationId xmlns:a16="http://schemas.microsoft.com/office/drawing/2014/main" id="{8A4F0631-8609-A86F-61CA-F7A2DEF9B1B9}"/>
             </a:ext>
           </a:extLst>
         </p:cNvPr>
@@ -390,7 +319,7 @@
           <p:cNvPr id="2" name="Slide Image Placeholder 1">
             <a:extLst>
               <a:ext uri="{FF2B5EF4-FFF2-40B4-BE49-F238E27FC236}">
-                <a16:creationId xmlns:a16="http://schemas.microsoft.com/office/drawing/2014/main" id="{2B7A5E53-DD98-09D3-640A-72585C2CBDBE}"/>
+                <a16:creationId xmlns:a16="http://schemas.microsoft.com/office/drawing/2014/main" id="{D44F6F1D-96EB-B820-97AA-AC316D520BFF}"/>
               </a:ext>
             </a:extLst>
           </p:cNvPr>
@@ -408,7 +337,7 @@
           <p:cNvPr id="3" name="Notes Placeholder 2">
             <a:extLst>
               <a:ext uri="{FF2B5EF4-FFF2-40B4-BE49-F238E27FC236}">
-                <a16:creationId xmlns:a16="http://schemas.microsoft.com/office/drawing/2014/main" id="{C7AAF8C1-BE5B-C533-58F0-06069B90C535}"/>
+                <a16:creationId xmlns:a16="http://schemas.microsoft.com/office/drawing/2014/main" id="{A712B989-E9E6-A6EB-B559-5E32072F51C7}"/>
               </a:ext>
             </a:extLst>
           </p:cNvPr>
@@ -433,7 +362,7 @@
           <p:cNvPr id="4" name="Slide Number Placeholder 3">
             <a:extLst>
               <a:ext uri="{FF2B5EF4-FFF2-40B4-BE49-F238E27FC236}">
-                <a16:creationId xmlns:a16="http://schemas.microsoft.com/office/drawing/2014/main" id="{6860B05A-BC81-544F-382C-BB61B09D5B44}"/>
+                <a16:creationId xmlns:a16="http://schemas.microsoft.com/office/drawing/2014/main" id="{30F5BEA1-D4A8-D85D-5484-80F155FA6DE3}"/>
               </a:ext>
             </a:extLst>
           </p:cNvPr>
@@ -456,9 +385,84 @@
     </p:spTree>
     <p:extLst>
       <p:ext uri="{BB962C8B-B14F-4D97-AF65-F5344CB8AC3E}">
-        <p14:creationId xmlns:p14="http://schemas.microsoft.com/office/powerpoint/2010/main" val="3803163228"/>
+        <p14:creationId xmlns:p14="http://schemas.microsoft.com/office/powerpoint/2010/main" val="2228464644"/>
       </p:ext>
     </p:extLst>
+  </p:cSld>
+  <p:clrMapOvr>
+    <a:masterClrMapping/>
+  </p:clrMapOvr>
+</p:notes>
+</file>
+
+<file path=ppt/notesSlides/notesSlide2.xml><?xml version="1.0" encoding="utf-8"?>
+<p:notes xmlns:a="http://schemas.openxmlformats.org/drawingml/2006/main" xmlns:r="http://schemas.openxmlformats.org/officeDocument/2006/relationships" xmlns:p="http://schemas.openxmlformats.org/presentationml/2006/main">
+  <p:cSld>
+    <p:spTree>
+      <p:nvGrpSpPr>
+        <p:cNvPr id="1" name=""/>
+        <p:cNvGrpSpPr/>
+        <p:nvPr/>
+      </p:nvGrpSpPr>
+      <p:grpSpPr>
+        <a:xfrm>
+          <a:off x="0" y="0"/>
+          <a:ext cx="0" cy="0"/>
+          <a:chOff x="0" y="0"/>
+          <a:chExt cx="0" cy="0"/>
+        </a:xfrm>
+      </p:grpSpPr>
+      <p:sp>
+        <p:nvSpPr>
+          <p:cNvPr id="2" name="Slide Image Placeholder 1"/>
+          <p:cNvSpPr>
+            <a:spLocks noGrp="1" noRot="1" noChangeAspect="1"/>
+          </p:cNvSpPr>
+          <p:nvPr>
+            <p:ph type="sldImg"/>
+          </p:nvPr>
+        </p:nvSpPr>
+        <p:spPr/>
+      </p:sp>
+      <p:sp>
+        <p:nvSpPr>
+          <p:cNvPr id="3" name="Notes Placeholder 2"/>
+          <p:cNvSpPr>
+            <a:spLocks noGrp="1"/>
+          </p:cNvSpPr>
+          <p:nvPr>
+            <p:ph type="body" idx="1"/>
+          </p:nvPr>
+        </p:nvSpPr>
+        <p:spPr/>
+        <p:txBody>
+          <a:bodyPr/>
+          <a:lstStyle/>
+          <a:p>
+            <a:endParaRPr dirty="0"/>
+          </a:p>
+        </p:txBody>
+      </p:sp>
+      <p:sp>
+        <p:nvSpPr>
+          <p:cNvPr id="4" name="Slide Number Placeholder 3"/>
+          <p:cNvSpPr>
+            <a:spLocks noGrp="1"/>
+          </p:cNvSpPr>
+          <p:nvPr>
+            <p:ph type="sldNum" idx="5"/>
+          </p:nvPr>
+        </p:nvSpPr>
+        <p:spPr/>
+        <p:txBody>
+          <a:bodyPr/>
+          <a:lstStyle/>
+          <a:p>
+            <a:endParaRPr/>
+          </a:p>
+        </p:txBody>
+      </p:sp>
+    </p:spTree>
   </p:cSld>
   <p:clrMapOvr>
     <a:masterClrMapping/>
@@ -484,6 +488,174 @@
         </a:xfrm>
       </p:grpSpPr>
     </p:spTree>
+  </p:cSld>
+  <p:clrMapOvr>
+    <a:masterClrMapping/>
+  </p:clrMapOvr>
+</p:sldLayout>
+</file>
+
+<file path=ppt/slideLayouts/slideLayout2.xml><?xml version="1.0" encoding="utf-8"?>
+<p:sldLayout xmlns:a="http://schemas.openxmlformats.org/drawingml/2006/main" xmlns:r="http://schemas.openxmlformats.org/officeDocument/2006/relationships" xmlns:p="http://schemas.openxmlformats.org/presentationml/2006/main" type="obj">
+  <p:cSld name="标题和内容">
+    <p:spTree>
+      <p:nvGrpSpPr>
+        <p:cNvPr id="1" name=""/>
+        <p:cNvGrpSpPr/>
+        <p:nvPr/>
+      </p:nvGrpSpPr>
+      <p:grpSpPr>
+        <a:xfrm>
+          <a:off x="0" y="0"/>
+          <a:ext cx="0" cy="0"/>
+          <a:chOff x="0" y="0"/>
+          <a:chExt cx="0" cy="0"/>
+        </a:xfrm>
+      </p:grpSpPr>
+      <p:sp>
+        <p:nvSpPr>
+          <p:cNvPr id="2" name="标题 1"/>
+          <p:cNvSpPr>
+            <a:spLocks noGrp="1"/>
+          </p:cNvSpPr>
+          <p:nvPr>
+            <p:ph type="title"/>
+          </p:nvPr>
+        </p:nvSpPr>
+        <p:spPr/>
+        <p:txBody>
+          <a:bodyPr/>
+          <a:lstStyle/>
+          <a:p>
+            <a:r>
+              <a:rPr lang="zh-CN" altLang="en-US"/>
+              <a:t>单击此处编辑母版标题样式</a:t>
+            </a:r>
+          </a:p>
+        </p:txBody>
+      </p:sp>
+      <p:sp>
+        <p:nvSpPr>
+          <p:cNvPr id="3" name="内容占位符 2"/>
+          <p:cNvSpPr>
+            <a:spLocks noGrp="1"/>
+          </p:cNvSpPr>
+          <p:nvPr>
+            <p:ph idx="1"/>
+          </p:nvPr>
+        </p:nvSpPr>
+        <p:spPr/>
+        <p:txBody>
+          <a:bodyPr/>
+          <a:lstStyle/>
+          <a:p>
+            <a:pPr lvl="0"/>
+            <a:r>
+              <a:rPr lang="zh-CN" altLang="en-US"/>
+              <a:t>单击此处编辑母版文本样式</a:t>
+            </a:r>
+          </a:p>
+          <a:p>
+            <a:pPr lvl="1"/>
+            <a:r>
+              <a:rPr lang="zh-CN" altLang="en-US"/>
+              <a:t>第二级</a:t>
+            </a:r>
+          </a:p>
+          <a:p>
+            <a:pPr lvl="2"/>
+            <a:r>
+              <a:rPr lang="zh-CN" altLang="en-US"/>
+              <a:t>第三级</a:t>
+            </a:r>
+          </a:p>
+          <a:p>
+            <a:pPr lvl="3"/>
+            <a:r>
+              <a:rPr lang="zh-CN" altLang="en-US"/>
+              <a:t>第四级</a:t>
+            </a:r>
+          </a:p>
+          <a:p>
+            <a:pPr lvl="4"/>
+            <a:r>
+              <a:rPr lang="zh-CN" altLang="en-US"/>
+              <a:t>第五级</a:t>
+            </a:r>
+          </a:p>
+        </p:txBody>
+      </p:sp>
+      <p:sp>
+        <p:nvSpPr>
+          <p:cNvPr id="4" name="日期占位符 3"/>
+          <p:cNvSpPr>
+            <a:spLocks noGrp="1"/>
+          </p:cNvSpPr>
+          <p:nvPr>
+            <p:ph type="dt" sz="half" idx="10"/>
+          </p:nvPr>
+        </p:nvSpPr>
+        <p:spPr/>
+        <p:txBody>
+          <a:bodyPr/>
+          <a:lstStyle/>
+          <a:p>
+            <a:fld id="{FD50BF48-0051-4EF5-ADA6-7B3DAEC4DBAD}" type="datetime1">
+              <a:rPr lang="zh-CN" altLang="en-US" smtClean="0"/>
+              <a:t>2026/8/22</a:t>
+            </a:fld>
+            <a:endParaRPr lang="zh-CN" altLang="en-US"/>
+          </a:p>
+        </p:txBody>
+      </p:sp>
+      <p:sp>
+        <p:nvSpPr>
+          <p:cNvPr id="5" name="页脚占位符 4"/>
+          <p:cNvSpPr>
+            <a:spLocks noGrp="1"/>
+          </p:cNvSpPr>
+          <p:nvPr>
+            <p:ph type="ftr" sz="quarter" idx="11"/>
+          </p:nvPr>
+        </p:nvSpPr>
+        <p:spPr/>
+        <p:txBody>
+          <a:bodyPr/>
+          <a:lstStyle/>
+          <a:p>
+            <a:endParaRPr lang="zh-CN" altLang="en-US"/>
+          </a:p>
+        </p:txBody>
+      </p:sp>
+      <p:sp>
+        <p:nvSpPr>
+          <p:cNvPr id="6" name="灯片编号占位符 5"/>
+          <p:cNvSpPr>
+            <a:spLocks noGrp="1"/>
+          </p:cNvSpPr>
+          <p:nvPr>
+            <p:ph type="sldNum" sz="quarter" idx="12"/>
+          </p:nvPr>
+        </p:nvSpPr>
+        <p:spPr/>
+        <p:txBody>
+          <a:bodyPr/>
+          <a:lstStyle/>
+          <a:p>
+            <a:fld id="{D5735EE2-985B-4B4E-9F4E-44985C39245F}" type="slidenum">
+              <a:rPr lang="zh-CN" altLang="en-US" smtClean="0"/>
+              <a:t>‹#›</a:t>
+            </a:fld>
+            <a:endParaRPr lang="zh-CN" altLang="en-US"/>
+          </a:p>
+        </p:txBody>
+      </p:sp>
+    </p:spTree>
+    <p:extLst>
+      <p:ext uri="{BB962C8B-B14F-4D97-AF65-F5344CB8AC3E}">
+        <p14:creationId xmlns:p14="http://schemas.microsoft.com/office/powerpoint/2010/main" val="2100431817"/>
+      </p:ext>
+    </p:extLst>
   </p:cSld>
   <p:clrMapOvr>
     <a:masterClrMapping/>
@@ -518,6 +690,7 @@
   <p:clrMap bg1="lt1" tx1="dk1" bg2="lt2" tx2="dk2" accent1="accent1" accent2="accent2" accent3="accent3" accent4="accent4" accent5="accent5" accent6="accent6" hlink="hlink" folHlink="folHlink"/>
   <p:sldLayoutIdLst>
     <p:sldLayoutId id="2147483649" r:id="rId1"/>
+    <p:sldLayoutId id="2147483650" r:id="rId2"/>
   </p:sldLayoutIdLst>
   <p:txStyles>
     <p:titleStyle>
@@ -802,6 +975,72 @@
 <file path=ppt/slides/slide1.xml><?xml version="1.0" encoding="utf-8"?>
 <p:sld xmlns:a="http://schemas.openxmlformats.org/drawingml/2006/main" xmlns:r="http://schemas.openxmlformats.org/officeDocument/2006/relationships" xmlns:p="http://schemas.openxmlformats.org/presentationml/2006/main">
   <p:cSld>
+    <p:spTree>
+      <p:nvGrpSpPr>
+        <p:cNvPr id="1" name="">
+          <a:extLst>
+            <a:ext uri="{FF2B5EF4-FFF2-40B4-BE49-F238E27FC236}">
+              <a16:creationId xmlns:a16="http://schemas.microsoft.com/office/drawing/2014/main" id="{A96A5547-8727-D89D-BEBF-3DF399DC47DA}"/>
+            </a:ext>
+          </a:extLst>
+        </p:cNvPr>
+        <p:cNvGrpSpPr/>
+        <p:nvPr/>
+      </p:nvGrpSpPr>
+      <p:grpSpPr>
+        <a:xfrm>
+          <a:off x="0" y="0"/>
+          <a:ext cx="0" cy="0"/>
+          <a:chOff x="0" y="0"/>
+          <a:chExt cx="0" cy="0"/>
+        </a:xfrm>
+      </p:grpSpPr>
+      <p:pic>
+        <p:nvPicPr>
+          <p:cNvPr id="4" name="图片 3">
+            <a:extLst>
+              <a:ext uri="{FF2B5EF4-FFF2-40B4-BE49-F238E27FC236}">
+                <a16:creationId xmlns:a16="http://schemas.microsoft.com/office/drawing/2014/main" id="{5BD13F32-58B5-3D05-5C5B-D597D81EB7F4}"/>
+              </a:ext>
+            </a:extLst>
+          </p:cNvPr>
+          <p:cNvPicPr>
+            <a:picLocks noChangeAspect="1"/>
+          </p:cNvPicPr>
+          <p:nvPr/>
+        </p:nvPicPr>
+        <p:blipFill>
+          <a:blip r:embed="rId3"/>
+          <a:stretch>
+            <a:fillRect/>
+          </a:stretch>
+        </p:blipFill>
+        <p:spPr>
+          <a:xfrm>
+            <a:off x="2209800" y="2312880"/>
+            <a:ext cx="7772400" cy="2232240"/>
+          </a:xfrm>
+          <a:prstGeom prst="rect">
+            <a:avLst/>
+          </a:prstGeom>
+        </p:spPr>
+      </p:pic>
+    </p:spTree>
+    <p:extLst>
+      <p:ext uri="{BB962C8B-B14F-4D97-AF65-F5344CB8AC3E}">
+        <p14:creationId xmlns:p14="http://schemas.microsoft.com/office/powerpoint/2010/main" val="3804230459"/>
+      </p:ext>
+    </p:extLst>
+  </p:cSld>
+  <p:clrMapOvr>
+    <a:masterClrMapping/>
+  </p:clrMapOvr>
+</p:sld>
+</file>
+
+<file path=ppt/slides/slide2.xml><?xml version="1.0" encoding="utf-8"?>
+<p:sld xmlns:a="http://schemas.openxmlformats.org/drawingml/2006/main" xmlns:r="http://schemas.openxmlformats.org/officeDocument/2006/relationships" xmlns:p="http://schemas.openxmlformats.org/presentationml/2006/main">
+  <p:cSld>
     <p:bg>
       <p:bgPr>
         <a:solidFill>
@@ -854,6 +1093,1106 @@
           </a:prstGeom>
         </p:spPr>
       </p:pic>
+      <p:sp>
+        <p:nvSpPr>
+          <p:cNvPr id="2" name="文本框 1">
+            <a:extLst>
+              <a:ext uri="{FF2B5EF4-FFF2-40B4-BE49-F238E27FC236}">
+                <a16:creationId xmlns:a16="http://schemas.microsoft.com/office/drawing/2014/main" id="{5D23DD80-BFC8-7607-049E-8B8E72209212}"/>
+              </a:ext>
+            </a:extLst>
+          </p:cNvPr>
+          <p:cNvSpPr txBox="1"/>
+          <p:nvPr/>
+        </p:nvSpPr>
+        <p:spPr>
+          <a:xfrm>
+            <a:off x="-53528" y="1828562"/>
+            <a:ext cx="2263328" cy="1600438"/>
+          </a:xfrm>
+          <a:prstGeom prst="rect">
+            <a:avLst/>
+          </a:prstGeom>
+          <a:noFill/>
+        </p:spPr>
+        <p:txBody>
+          <a:bodyPr wrap="square">
+            <a:spAutoFit/>
+          </a:bodyPr>
+          <a:lstStyle/>
+          <a:p>
+            <a:pPr algn="ctr"/>
+            <a:r>
+              <a:rPr lang="en-US" altLang="zh-CN" sz="1400" i="1" dirty="0"/>
+              <a:t>H=50</a:t>
+            </a:r>
+            <a:r>
+              <a:rPr lang="zh-CN" altLang="en-US" sz="1400" i="1" dirty="0"/>
+              <a:t> </a:t>
+            </a:r>
+            <a:r>
+              <a:rPr lang="en-US" altLang="zh-CN" sz="1400" i="1" dirty="0"/>
+              <a:t>|</a:t>
+            </a:r>
+            <a:r>
+              <a:rPr lang="zh-CN" altLang="en-US" sz="1400" i="1" dirty="0"/>
+              <a:t> </a:t>
+            </a:r>
+            <a:r>
+              <a:rPr lang="en-US" altLang="zh-CN" sz="1400" i="1" dirty="0"/>
+              <a:t>123</a:t>
+            </a:r>
+            <a:r>
+              <a:rPr lang="zh-CN" altLang="en-US" sz="1400" i="1" dirty="0"/>
+              <a:t> </a:t>
+            </a:r>
+            <a:r>
+              <a:rPr lang="en-US" altLang="zh-CN" sz="1400" i="1" dirty="0"/>
+              <a:t>dim</a:t>
+            </a:r>
+            <a:r>
+              <a:rPr lang="zh-CN" altLang="en-US" sz="1400" i="1" dirty="0"/>
+              <a:t> </a:t>
+            </a:r>
+            <a:r>
+              <a:rPr lang="en-US" altLang="zh-CN" sz="1400" i="1" dirty="0"/>
+              <a:t>per</a:t>
+            </a:r>
+            <a:r>
+              <a:rPr lang="zh-CN" altLang="en-US" sz="1400" i="1" dirty="0"/>
+              <a:t> </a:t>
+            </a:r>
+            <a:r>
+              <a:rPr lang="en-US" altLang="zh-CN" sz="1400" i="1" dirty="0"/>
+              <a:t>step</a:t>
+            </a:r>
+          </a:p>
+          <a:p>
+            <a:pPr algn="ctr"/>
+            <a:r>
+              <a:rPr lang="en-US" altLang="zh-CN" sz="1400" i="1" dirty="0"/>
+              <a:t>108</a:t>
+            </a:r>
+            <a:r>
+              <a:rPr lang="zh-CN" altLang="en-US" sz="1400" i="1" dirty="0"/>
+              <a:t> </a:t>
+            </a:r>
+            <a:r>
+              <a:rPr lang="en-US" altLang="zh-CN" sz="1400" i="1" dirty="0"/>
+              <a:t>proprioception</a:t>
+            </a:r>
+            <a:r>
+              <a:rPr lang="zh-CN" altLang="en-US" sz="1400" i="1" dirty="0"/>
+              <a:t> </a:t>
+            </a:r>
+            <a:r>
+              <a:rPr lang="en-US" altLang="zh-CN" sz="1400" i="1" dirty="0"/>
+              <a:t>+</a:t>
+            </a:r>
+            <a:r>
+              <a:rPr lang="zh-CN" altLang="en-US" sz="1400" i="1" dirty="0"/>
+              <a:t> </a:t>
+            </a:r>
+            <a:r>
+              <a:rPr lang="en-US" altLang="zh-CN" sz="1400" i="1" dirty="0"/>
+              <a:t>15</a:t>
+            </a:r>
+            <a:r>
+              <a:rPr lang="zh-CN" altLang="en-US" sz="1400" i="1" dirty="0"/>
+              <a:t> </a:t>
+            </a:r>
+            <a:r>
+              <a:rPr lang="en-US" altLang="zh-CN" sz="1400" i="1" dirty="0"/>
+              <a:t>Task</a:t>
+            </a:r>
+          </a:p>
+          <a:p>
+            <a:pPr algn="ctr"/>
+            <a:endParaRPr lang="en-US" altLang="zh-CN" sz="1400" i="1" dirty="0"/>
+          </a:p>
+          <a:p>
+            <a:pPr algn="ctr"/>
+            <a:r>
+              <a:rPr lang="en-US" altLang="zh-CN" sz="1400" i="1" dirty="0"/>
+              <a:t>box</a:t>
+            </a:r>
+            <a:r>
+              <a:rPr lang="zh-CN" altLang="en-US" sz="1400" i="1" dirty="0"/>
+              <a:t> </a:t>
+            </a:r>
+            <a:r>
+              <a:rPr lang="en-US" altLang="zh-CN" sz="1400" i="1" dirty="0"/>
+              <a:t>local</a:t>
+            </a:r>
+            <a:r>
+              <a:rPr lang="zh-CN" altLang="en-US" sz="1400" i="1" dirty="0"/>
+              <a:t> </a:t>
+            </a:r>
+            <a:r>
+              <a:rPr lang="en-US" altLang="zh-CN" sz="1400" i="1" dirty="0"/>
+              <a:t>position</a:t>
+            </a:r>
+            <a:r>
+              <a:rPr lang="zh-CN" altLang="en-US" sz="1400" i="1" dirty="0"/>
+              <a:t> </a:t>
+            </a:r>
+            <a:r>
+              <a:rPr lang="en-US" altLang="zh-CN" sz="1400" i="1" dirty="0"/>
+              <a:t>3D</a:t>
+            </a:r>
+          </a:p>
+          <a:p>
+            <a:pPr algn="ctr"/>
+            <a:r>
+              <a:rPr lang="en-US" altLang="zh-CN" sz="1400" i="1" dirty="0"/>
+              <a:t>box</a:t>
+            </a:r>
+            <a:r>
+              <a:rPr lang="zh-CN" altLang="en-US" sz="1400" i="1" dirty="0"/>
+              <a:t> </a:t>
+            </a:r>
+            <a:r>
+              <a:rPr lang="en-US" altLang="zh-CN" sz="1400" i="1" dirty="0"/>
+              <a:t>local</a:t>
+            </a:r>
+            <a:r>
+              <a:rPr lang="zh-CN" altLang="en-US" sz="1400" i="1" dirty="0"/>
+              <a:t> </a:t>
+            </a:r>
+            <a:r>
+              <a:rPr lang="en-US" altLang="zh-CN" sz="1400" i="1" dirty="0"/>
+              <a:t>rotation</a:t>
+            </a:r>
+            <a:r>
+              <a:rPr lang="zh-CN" altLang="en-US" sz="1400" i="1" dirty="0"/>
+              <a:t> </a:t>
+            </a:r>
+            <a:r>
+              <a:rPr lang="en-US" altLang="zh-CN" sz="1400" i="1" dirty="0"/>
+              <a:t>6D</a:t>
+            </a:r>
+          </a:p>
+          <a:p>
+            <a:pPr algn="ctr"/>
+            <a:r>
+              <a:rPr lang="en-US" altLang="zh-CN" sz="1400" i="1" dirty="0"/>
+              <a:t>box</a:t>
+            </a:r>
+            <a:r>
+              <a:rPr lang="zh-CN" altLang="en-US" sz="1400" i="1" dirty="0"/>
+              <a:t> </a:t>
+            </a:r>
+            <a:r>
+              <a:rPr lang="en-US" altLang="zh-CN" sz="1400" i="1" dirty="0"/>
+              <a:t>size</a:t>
+            </a:r>
+            <a:r>
+              <a:rPr lang="zh-CN" altLang="en-US" sz="1400" i="1" dirty="0"/>
+              <a:t> </a:t>
+            </a:r>
+            <a:r>
+              <a:rPr lang="en-US" altLang="zh-CN" sz="1400" i="1" dirty="0"/>
+              <a:t>3D</a:t>
+            </a:r>
+          </a:p>
+          <a:p>
+            <a:pPr algn="ctr"/>
+            <a:r>
+              <a:rPr lang="en-US" altLang="zh-CN" sz="1400" i="1" dirty="0"/>
+              <a:t>box</a:t>
+            </a:r>
+            <a:r>
+              <a:rPr lang="zh-CN" altLang="en-US" sz="1400" i="1" dirty="0"/>
+              <a:t> </a:t>
+            </a:r>
+            <a:r>
+              <a:rPr lang="en-US" altLang="zh-CN" sz="1400" i="1" dirty="0"/>
+              <a:t>target</a:t>
+            </a:r>
+            <a:r>
+              <a:rPr lang="zh-CN" altLang="en-US" sz="1400" i="1" dirty="0"/>
+              <a:t> </a:t>
+            </a:r>
+            <a:r>
+              <a:rPr lang="en-US" altLang="zh-CN" sz="1400" i="1" dirty="0"/>
+              <a:t>position</a:t>
+            </a:r>
+            <a:r>
+              <a:rPr lang="zh-CN" altLang="en-US" sz="1400" i="1" dirty="0"/>
+              <a:t> </a:t>
+            </a:r>
+            <a:r>
+              <a:rPr lang="en-US" altLang="zh-CN" sz="1400" i="1" dirty="0"/>
+              <a:t>3D</a:t>
+            </a:r>
+            <a:r>
+              <a:rPr lang="zh-CN" altLang="en-US" sz="1400" i="1" dirty="0"/>
+              <a:t> </a:t>
+            </a:r>
+            <a:endParaRPr lang="en-US" altLang="zh-CN" sz="1400" i="1" dirty="0"/>
+          </a:p>
+        </p:txBody>
+      </p:sp>
+      <p:sp>
+        <p:nvSpPr>
+          <p:cNvPr id="3" name="文本框 2">
+            <a:extLst>
+              <a:ext uri="{FF2B5EF4-FFF2-40B4-BE49-F238E27FC236}">
+                <a16:creationId xmlns:a16="http://schemas.microsoft.com/office/drawing/2014/main" id="{D69256C5-7866-4050-A2A3-40B2FA8B03EA}"/>
+              </a:ext>
+            </a:extLst>
+          </p:cNvPr>
+          <p:cNvSpPr txBox="1"/>
+          <p:nvPr/>
+        </p:nvSpPr>
+        <p:spPr>
+          <a:xfrm>
+            <a:off x="1677303" y="5540439"/>
+            <a:ext cx="1614538" cy="738664"/>
+          </a:xfrm>
+          <a:prstGeom prst="rect">
+            <a:avLst/>
+          </a:prstGeom>
+          <a:noFill/>
+        </p:spPr>
+        <p:txBody>
+          <a:bodyPr wrap="square">
+            <a:spAutoFit/>
+          </a:bodyPr>
+          <a:lstStyle/>
+          <a:p>
+            <a:pPr algn="ctr"/>
+            <a:r>
+              <a:rPr lang="en-US" altLang="zh-CN" sz="1400" i="1" dirty="0"/>
+              <a:t>h′ = </a:t>
+            </a:r>
+            <a:r>
+              <a:rPr lang="el-GR" altLang="zh-CN" sz="1400" i="1" dirty="0"/>
+              <a:t>γ⊙</a:t>
+            </a:r>
+            <a:r>
+              <a:rPr lang="en-US" altLang="zh-CN" sz="1400" i="1" dirty="0"/>
+              <a:t>h + </a:t>
+            </a:r>
+            <a:r>
+              <a:rPr lang="el-GR" altLang="zh-CN" sz="1400" i="1" dirty="0"/>
+              <a:t>β</a:t>
+            </a:r>
+            <a:endParaRPr lang="en-US" altLang="zh-CN" sz="1400" i="1" dirty="0"/>
+          </a:p>
+          <a:p>
+            <a:pPr algn="ctr"/>
+            <a:r>
+              <a:rPr lang="el-GR" altLang="zh-CN" sz="1400" i="1" dirty="0" err="1"/>
+              <a:t>FiLM</a:t>
+            </a:r>
+            <a:r>
+              <a:rPr lang="zh-CN" altLang="el-GR" sz="1400" i="1" dirty="0"/>
+              <a:t>输出</a:t>
+            </a:r>
+            <a:r>
+              <a:rPr lang="zh-CN" altLang="en-US" sz="1400" i="1" dirty="0"/>
+              <a:t> </a:t>
+            </a:r>
+            <a:r>
+              <a:rPr lang="en-US" altLang="zh-CN" sz="1400" i="1" dirty="0" err="1"/>
+              <a:t>γ</a:t>
+            </a:r>
+            <a:r>
+              <a:rPr lang="zh-CN" altLang="en-US" sz="1400" i="1" dirty="0"/>
+              <a:t> 和 </a:t>
+            </a:r>
+            <a:r>
+              <a:rPr lang="en-US" altLang="zh-CN" sz="1400" i="1" dirty="0"/>
+              <a:t>β</a:t>
+            </a:r>
+          </a:p>
+          <a:p>
+            <a:pPr algn="ctr"/>
+            <a:r>
+              <a:rPr lang="en-US" altLang="zh-CN" sz="1400" i="1" dirty="0"/>
+              <a:t>h</a:t>
+            </a:r>
+            <a:r>
+              <a:rPr lang="zh-CN" altLang="en-US" sz="1400" i="1" dirty="0"/>
+              <a:t> 是 </a:t>
+            </a:r>
+            <a:r>
+              <a:rPr lang="en-US" altLang="zh-CN" sz="1400" i="1" dirty="0"/>
+              <a:t>π</a:t>
+            </a:r>
+            <a:r>
+              <a:rPr lang="zh-CN" altLang="en-US" sz="1400" i="1" dirty="0"/>
+              <a:t> 的隐藏层</a:t>
+            </a:r>
+          </a:p>
+        </p:txBody>
+      </p:sp>
+      <p:sp>
+        <p:nvSpPr>
+          <p:cNvPr id="4" name="文本框 3">
+            <a:extLst>
+              <a:ext uri="{FF2B5EF4-FFF2-40B4-BE49-F238E27FC236}">
+                <a16:creationId xmlns:a16="http://schemas.microsoft.com/office/drawing/2014/main" id="{A3E7CFD9-5CD9-44AE-723D-1505F0CAF9D5}"/>
+              </a:ext>
+            </a:extLst>
+          </p:cNvPr>
+          <p:cNvSpPr txBox="1"/>
+          <p:nvPr/>
+        </p:nvSpPr>
+        <p:spPr>
+          <a:xfrm>
+            <a:off x="3098075" y="1663902"/>
+            <a:ext cx="1360714" cy="523220"/>
+          </a:xfrm>
+          <a:prstGeom prst="rect">
+            <a:avLst/>
+          </a:prstGeom>
+          <a:noFill/>
+        </p:spPr>
+        <p:txBody>
+          <a:bodyPr wrap="square">
+            <a:spAutoFit/>
+          </a:bodyPr>
+          <a:lstStyle/>
+          <a:p>
+            <a:pPr algn="ctr"/>
+            <a:r>
+              <a:rPr lang="en-US" altLang="zh-CN" sz="1400" i="1" dirty="0"/>
+              <a:t>Conv1d</a:t>
+            </a:r>
+            <a:r>
+              <a:rPr lang="zh-CN" altLang="en-US" sz="1400" i="1" dirty="0"/>
+              <a:t> </a:t>
+            </a:r>
+            <a:r>
+              <a:rPr lang="en-US" altLang="zh-CN" sz="1400" i="1" dirty="0"/>
+              <a:t>+</a:t>
+            </a:r>
+            <a:r>
+              <a:rPr lang="zh-CN" altLang="en-US" sz="1400" i="1" dirty="0"/>
+              <a:t> </a:t>
+            </a:r>
+            <a:r>
+              <a:rPr lang="en-US" altLang="zh-CN" sz="1400" i="1" dirty="0"/>
+              <a:t>ELU</a:t>
+            </a:r>
+          </a:p>
+          <a:p>
+            <a:pPr algn="ctr"/>
+            <a:r>
+              <a:rPr lang="en-US" altLang="zh-CN" sz="1400" i="1" dirty="0"/>
+              <a:t>50</a:t>
+            </a:r>
+            <a:r>
+              <a:rPr lang="zh-CN" altLang="en-US" sz="1400" i="1" dirty="0"/>
+              <a:t> </a:t>
+            </a:r>
+            <a:r>
+              <a:rPr lang="en-US" altLang="zh-CN" sz="1400" i="1" dirty="0"/>
+              <a:t>x</a:t>
+            </a:r>
+            <a:r>
+              <a:rPr lang="zh-CN" altLang="en-US" sz="1400" i="1" dirty="0"/>
+              <a:t> </a:t>
+            </a:r>
+            <a:r>
+              <a:rPr lang="en-US" altLang="zh-CN" sz="1400" i="1" dirty="0"/>
+              <a:t>123</a:t>
+            </a:r>
+            <a:r>
+              <a:rPr lang="zh-CN" altLang="en-US" sz="1400" i="1" dirty="0"/>
+              <a:t> </a:t>
+            </a:r>
+            <a:r>
+              <a:rPr lang="en-US" altLang="zh-CN" sz="1400" i="1" dirty="0"/>
+              <a:t>-&gt;</a:t>
+            </a:r>
+            <a:r>
+              <a:rPr lang="zh-CN" altLang="en-US" sz="1400" i="1" dirty="0"/>
+              <a:t> </a:t>
+            </a:r>
+            <a:r>
+              <a:rPr lang="en-US" altLang="zh-CN" sz="1400" i="1" dirty="0"/>
+              <a:t>320</a:t>
+            </a:r>
+          </a:p>
+        </p:txBody>
+      </p:sp>
+      <p:sp>
+        <p:nvSpPr>
+          <p:cNvPr id="5" name="文本框 4">
+            <a:extLst>
+              <a:ext uri="{FF2B5EF4-FFF2-40B4-BE49-F238E27FC236}">
+                <a16:creationId xmlns:a16="http://schemas.microsoft.com/office/drawing/2014/main" id="{2ACE7E2D-9C7F-6FF2-C6C5-FB8EC4848EB3}"/>
+              </a:ext>
+            </a:extLst>
+          </p:cNvPr>
+          <p:cNvSpPr txBox="1"/>
+          <p:nvPr/>
+        </p:nvSpPr>
+        <p:spPr>
+          <a:xfrm>
+            <a:off x="9982200" y="3490554"/>
+            <a:ext cx="1915303" cy="1169551"/>
+          </a:xfrm>
+          <a:prstGeom prst="rect">
+            <a:avLst/>
+          </a:prstGeom>
+          <a:noFill/>
+        </p:spPr>
+        <p:txBody>
+          <a:bodyPr wrap="square">
+            <a:spAutoFit/>
+          </a:bodyPr>
+          <a:lstStyle/>
+          <a:p>
+            <a:pPr algn="ctr"/>
+            <a:r>
+              <a:rPr lang="el-GR" altLang="zh-CN" sz="1400" i="1" dirty="0"/>
+              <a:t>Δ</a:t>
+            </a:r>
+            <a:r>
+              <a:rPr lang="en-US" altLang="zh-CN" sz="1400" i="1" dirty="0" err="1"/>
+              <a:t>ô^robot</a:t>
+            </a:r>
+            <a:r>
+              <a:rPr lang="en-US" altLang="zh-CN" sz="1400" i="1" dirty="0"/>
+              <a:t>_{t+1}</a:t>
+            </a:r>
+            <a:r>
+              <a:rPr lang="zh-CN" altLang="en-US" sz="1400" i="1" dirty="0"/>
+              <a:t> 从 </a:t>
+            </a:r>
+            <a:r>
+              <a:rPr lang="en-US" altLang="zh-CN" sz="1400" i="1" dirty="0"/>
+              <a:t>t</a:t>
+            </a:r>
+            <a:r>
+              <a:rPr lang="zh-CN" altLang="en-US" sz="1400" i="1" dirty="0"/>
+              <a:t> 到 </a:t>
+            </a:r>
+            <a:r>
+              <a:rPr lang="en-US" altLang="zh-CN" sz="1400" i="1" dirty="0"/>
+              <a:t>t+1</a:t>
+            </a:r>
+            <a:r>
+              <a:rPr lang="zh-CN" altLang="en-US" sz="1400" i="1" dirty="0"/>
+              <a:t> 的物体位姿变化</a:t>
+            </a:r>
+            <a:endParaRPr lang="en-US" altLang="zh-CN" sz="1400" i="1" dirty="0"/>
+          </a:p>
+          <a:p>
+            <a:pPr algn="ctr"/>
+            <a:endParaRPr lang="en-US" altLang="zh-CN" sz="1400" i="1" dirty="0"/>
+          </a:p>
+          <a:p>
+            <a:pPr algn="ctr"/>
+            <a:r>
+              <a:rPr lang="en" altLang="zh-CN" sz="1400" i="1" dirty="0" err="1"/>
+              <a:t>m_eff,t</a:t>
+            </a:r>
+            <a:r>
+              <a:rPr lang="en" altLang="zh-CN" sz="1400" i="1" dirty="0"/>
+              <a:t> = ℓ̂_t · </a:t>
+            </a:r>
+            <a:r>
+              <a:rPr lang="en" altLang="zh-CN" sz="1400" i="1" dirty="0" err="1"/>
+              <a:t>m̂_t</a:t>
+            </a:r>
+            <a:r>
+              <a:rPr lang="zh-CN" altLang="en" sz="1400" i="1" dirty="0"/>
+              <a:t>（</a:t>
+            </a:r>
+            <a:r>
+              <a:rPr lang="zh-CN" altLang="en-US" sz="1400" i="1" dirty="0"/>
+              <a:t>载货概率 </a:t>
+            </a:r>
+            <a:r>
+              <a:rPr lang="en-US" altLang="zh-CN" sz="1400" i="1" dirty="0"/>
+              <a:t>× </a:t>
+            </a:r>
+            <a:r>
+              <a:rPr lang="zh-CN" altLang="en-US" sz="1400" i="1" dirty="0"/>
+              <a:t>质量）</a:t>
+            </a:r>
+          </a:p>
+        </p:txBody>
+      </p:sp>
+      <p:sp>
+        <p:nvSpPr>
+          <p:cNvPr id="6" name="文本框 5">
+            <a:extLst>
+              <a:ext uri="{FF2B5EF4-FFF2-40B4-BE49-F238E27FC236}">
+                <a16:creationId xmlns:a16="http://schemas.microsoft.com/office/drawing/2014/main" id="{05AB0DD5-F484-65C0-19A5-475028F19449}"/>
+              </a:ext>
+            </a:extLst>
+          </p:cNvPr>
+          <p:cNvSpPr txBox="1"/>
+          <p:nvPr/>
+        </p:nvSpPr>
+        <p:spPr>
+          <a:xfrm>
+            <a:off x="10155149" y="1709963"/>
+            <a:ext cx="1540782" cy="307777"/>
+          </a:xfrm>
+          <a:prstGeom prst="rect">
+            <a:avLst/>
+          </a:prstGeom>
+          <a:noFill/>
+        </p:spPr>
+        <p:txBody>
+          <a:bodyPr wrap="square">
+            <a:spAutoFit/>
+          </a:bodyPr>
+          <a:lstStyle/>
+          <a:p>
+            <a:pPr algn="ctr"/>
+            <a:r>
+              <a:rPr lang="zh-CN" altLang="en-US" sz="1400" i="1" dirty="0"/>
+              <a:t>预测物体怎么动</a:t>
+            </a:r>
+          </a:p>
+        </p:txBody>
+      </p:sp>
+      <p:sp>
+        <p:nvSpPr>
+          <p:cNvPr id="7" name="文本框 6">
+            <a:extLst>
+              <a:ext uri="{FF2B5EF4-FFF2-40B4-BE49-F238E27FC236}">
+                <a16:creationId xmlns:a16="http://schemas.microsoft.com/office/drawing/2014/main" id="{B10F3915-AF22-08D9-FBD2-683654999B73}"/>
+              </a:ext>
+            </a:extLst>
+          </p:cNvPr>
+          <p:cNvSpPr txBox="1"/>
+          <p:nvPr/>
+        </p:nvSpPr>
+        <p:spPr>
+          <a:xfrm>
+            <a:off x="4333415" y="682104"/>
+            <a:ext cx="2261150" cy="954107"/>
+          </a:xfrm>
+          <a:prstGeom prst="rect">
+            <a:avLst/>
+          </a:prstGeom>
+          <a:noFill/>
+        </p:spPr>
+        <p:txBody>
+          <a:bodyPr wrap="square">
+            <a:spAutoFit/>
+          </a:bodyPr>
+          <a:lstStyle/>
+          <a:p>
+            <a:pPr algn="ctr"/>
+            <a:r>
+              <a:rPr lang="en-US" altLang="zh-CN" sz="1400" i="1" dirty="0"/>
+              <a:t>Linear</a:t>
+            </a:r>
+            <a:r>
+              <a:rPr lang="zh-CN" altLang="en-US" sz="1400" i="1" dirty="0"/>
+              <a:t> </a:t>
+            </a:r>
+            <a:r>
+              <a:rPr lang="en-US" altLang="zh-CN" sz="1400" i="1" dirty="0"/>
+              <a:t>+</a:t>
+            </a:r>
+            <a:r>
+              <a:rPr lang="zh-CN" altLang="en-US" sz="1400" i="1" dirty="0"/>
+              <a:t> </a:t>
+            </a:r>
+            <a:r>
+              <a:rPr lang="en-US" altLang="zh-CN" sz="1400" i="1" dirty="0"/>
+              <a:t>ELU</a:t>
+            </a:r>
+            <a:r>
+              <a:rPr lang="zh-CN" altLang="en-US" sz="1400" i="1" dirty="0"/>
+              <a:t> </a:t>
+            </a:r>
+            <a:r>
+              <a:rPr lang="en-US" altLang="zh-CN" sz="1400" i="1" dirty="0"/>
+              <a:t>x</a:t>
+            </a:r>
+            <a:r>
+              <a:rPr lang="zh-CN" altLang="en-US" sz="1400" i="1" dirty="0"/>
+              <a:t> </a:t>
+            </a:r>
+            <a:r>
+              <a:rPr lang="en-US" altLang="zh-CN" sz="1400" i="1" dirty="0"/>
+              <a:t>2</a:t>
+            </a:r>
+          </a:p>
+          <a:p>
+            <a:pPr algn="ctr"/>
+            <a:r>
+              <a:rPr lang="zh-CN" altLang="en-US" sz="1400" i="1" dirty="0"/>
+              <a:t>预测质量</a:t>
+            </a:r>
+            <a:endParaRPr lang="en-US" altLang="zh-CN" sz="1400" i="1" dirty="0"/>
+          </a:p>
+          <a:p>
+            <a:pPr algn="ctr"/>
+            <a:r>
+              <a:rPr lang="zh-CN" altLang="en-US" sz="1400" i="1" dirty="0"/>
+              <a:t>手中有物体的概率</a:t>
+            </a:r>
+            <a:endParaRPr lang="en-US" altLang="zh-CN" sz="1400" i="1" dirty="0"/>
+          </a:p>
+          <a:p>
+            <a:pPr algn="ctr"/>
+            <a:r>
+              <a:rPr lang="en-US" altLang="zh-CN" sz="1400" i="1" dirty="0" err="1"/>
+              <a:t>z_obj</a:t>
+            </a:r>
+            <a:r>
+              <a:rPr lang="zh-CN" altLang="en-US" sz="1400" i="1" dirty="0"/>
+              <a:t> </a:t>
+            </a:r>
+            <a:r>
+              <a:rPr lang="en-US" altLang="zh-CN" sz="1400" i="1" dirty="0"/>
+              <a:t>16</a:t>
+            </a:r>
+            <a:r>
+              <a:rPr lang="zh-CN" altLang="en-US" sz="1400" i="1" dirty="0"/>
+              <a:t> </a:t>
+            </a:r>
+            <a:r>
+              <a:rPr lang="en-US" altLang="zh-CN" sz="1400" i="1" dirty="0"/>
+              <a:t>dim</a:t>
+            </a:r>
+            <a:endParaRPr lang="zh-CN" altLang="en-US" sz="1400" i="1" dirty="0"/>
+          </a:p>
+        </p:txBody>
+      </p:sp>
+      <p:sp>
+        <p:nvSpPr>
+          <p:cNvPr id="9" name="文本框 8">
+            <a:extLst>
+              <a:ext uri="{FF2B5EF4-FFF2-40B4-BE49-F238E27FC236}">
+                <a16:creationId xmlns:a16="http://schemas.microsoft.com/office/drawing/2014/main" id="{678607E8-8703-A8B2-BD8D-48FE88AE1D01}"/>
+              </a:ext>
+            </a:extLst>
+          </p:cNvPr>
+          <p:cNvSpPr txBox="1"/>
+          <p:nvPr/>
+        </p:nvSpPr>
+        <p:spPr>
+          <a:xfrm>
+            <a:off x="8028480" y="383354"/>
+            <a:ext cx="2019486" cy="954107"/>
+          </a:xfrm>
+          <a:prstGeom prst="rect">
+            <a:avLst/>
+          </a:prstGeom>
+          <a:noFill/>
+        </p:spPr>
+        <p:txBody>
+          <a:bodyPr wrap="square">
+            <a:spAutoFit/>
+          </a:bodyPr>
+          <a:lstStyle/>
+          <a:p>
+            <a:pPr algn="ctr"/>
+            <a:r>
+              <a:rPr lang="en-US" altLang="zh-CN" sz="1400" i="1" dirty="0"/>
+              <a:t>Split</a:t>
+            </a:r>
+            <a:r>
+              <a:rPr lang="zh-CN" altLang="en-US" sz="1400" i="1" dirty="0"/>
+              <a:t> </a:t>
+            </a:r>
+            <a:r>
+              <a:rPr lang="en-US" altLang="zh-CN" sz="1400" i="1" dirty="0"/>
+              <a:t>World</a:t>
+            </a:r>
+            <a:r>
+              <a:rPr lang="zh-CN" altLang="en-US" sz="1400" i="1" dirty="0"/>
+              <a:t> </a:t>
+            </a:r>
+            <a:r>
+              <a:rPr lang="en-US" altLang="zh-CN" sz="1400" i="1" dirty="0"/>
+              <a:t>Model</a:t>
+            </a:r>
+            <a:r>
+              <a:rPr lang="zh-CN" altLang="en-US" sz="1400" i="1" dirty="0"/>
+              <a:t> </a:t>
+            </a:r>
+            <a:r>
+              <a:rPr lang="en-US" altLang="zh-CN" sz="1400" i="1" dirty="0"/>
+              <a:t>(</a:t>
+            </a:r>
+            <a:r>
+              <a:rPr lang="zh-CN" altLang="en-US" sz="1400" i="1" dirty="0"/>
+              <a:t>从</a:t>
+            </a:r>
+            <a:r>
+              <a:rPr lang="en-US" altLang="zh-CN" sz="1400" i="1" dirty="0" err="1"/>
+              <a:t>AnyAdapter</a:t>
+            </a:r>
+            <a:r>
+              <a:rPr lang="zh-CN" altLang="en-US" sz="1400" i="1" dirty="0"/>
+              <a:t>中改来</a:t>
+            </a:r>
+            <a:r>
+              <a:rPr lang="en-US" altLang="zh-CN" sz="1400" i="1" dirty="0"/>
+              <a:t>)</a:t>
+            </a:r>
+            <a:r>
+              <a:rPr lang="zh-CN" altLang="en-US" sz="1400" i="1" dirty="0"/>
+              <a:t> 只用于训练两个 </a:t>
+            </a:r>
+            <a:r>
+              <a:rPr lang="en-US" altLang="zh-CN" sz="1400" i="1" dirty="0"/>
+              <a:t>Context</a:t>
+            </a:r>
+            <a:r>
+              <a:rPr lang="zh-CN" altLang="en-US" sz="1400" i="1" dirty="0"/>
+              <a:t> </a:t>
+            </a:r>
+            <a:r>
+              <a:rPr lang="en-US" altLang="zh-CN" sz="1400" i="1" dirty="0"/>
+              <a:t>Encoder</a:t>
+            </a:r>
+            <a:r>
+              <a:rPr lang="zh-CN" altLang="en-US" sz="1400" i="1" dirty="0"/>
+              <a:t>，部署时不需要</a:t>
+            </a:r>
+          </a:p>
+        </p:txBody>
+      </p:sp>
+      <p:sp>
+        <p:nvSpPr>
+          <p:cNvPr id="10" name="文本框 9">
+            <a:extLst>
+              <a:ext uri="{FF2B5EF4-FFF2-40B4-BE49-F238E27FC236}">
+                <a16:creationId xmlns:a16="http://schemas.microsoft.com/office/drawing/2014/main" id="{E6FD3E95-6CDD-E394-20F8-124C4BC2B09C}"/>
+              </a:ext>
+            </a:extLst>
+          </p:cNvPr>
+          <p:cNvSpPr txBox="1"/>
+          <p:nvPr/>
+        </p:nvSpPr>
+        <p:spPr>
+          <a:xfrm>
+            <a:off x="10115166" y="3125735"/>
+            <a:ext cx="1649373" cy="307777"/>
+          </a:xfrm>
+          <a:prstGeom prst="rect">
+            <a:avLst/>
+          </a:prstGeom>
+          <a:noFill/>
+        </p:spPr>
+        <p:txBody>
+          <a:bodyPr wrap="square">
+            <a:spAutoFit/>
+          </a:bodyPr>
+          <a:lstStyle/>
+          <a:p>
+            <a:pPr algn="ctr"/>
+            <a:r>
+              <a:rPr lang="zh-CN" altLang="en-US" sz="1400" i="1" dirty="0"/>
+              <a:t>预测机器人怎么动</a:t>
+            </a:r>
+          </a:p>
+        </p:txBody>
+      </p:sp>
+      <p:sp>
+        <p:nvSpPr>
+          <p:cNvPr id="11" name="文本框 10">
+            <a:extLst>
+              <a:ext uri="{FF2B5EF4-FFF2-40B4-BE49-F238E27FC236}">
+                <a16:creationId xmlns:a16="http://schemas.microsoft.com/office/drawing/2014/main" id="{81F95CD0-99C0-065E-309B-7C985C05CB6D}"/>
+              </a:ext>
+            </a:extLst>
+          </p:cNvPr>
+          <p:cNvSpPr txBox="1"/>
+          <p:nvPr/>
+        </p:nvSpPr>
+        <p:spPr>
+          <a:xfrm>
+            <a:off x="9982200" y="2017740"/>
+            <a:ext cx="1865548" cy="523220"/>
+          </a:xfrm>
+          <a:prstGeom prst="rect">
+            <a:avLst/>
+          </a:prstGeom>
+          <a:noFill/>
+        </p:spPr>
+        <p:txBody>
+          <a:bodyPr wrap="square">
+            <a:spAutoFit/>
+          </a:bodyPr>
+          <a:lstStyle/>
+          <a:p>
+            <a:pPr algn="ctr"/>
+            <a:r>
+              <a:rPr lang="el-GR" altLang="zh-CN" sz="1400" i="1" dirty="0"/>
+              <a:t>Δ</a:t>
+            </a:r>
+            <a:r>
+              <a:rPr lang="en-US" altLang="zh-CN" sz="1400" i="1" dirty="0" err="1"/>
+              <a:t>ô^obj</a:t>
+            </a:r>
+            <a:r>
+              <a:rPr lang="en-US" altLang="zh-CN" sz="1400" i="1" dirty="0"/>
+              <a:t>_{t+1}</a:t>
+            </a:r>
+            <a:r>
+              <a:rPr lang="zh-CN" altLang="en-US" sz="1400" i="1" dirty="0"/>
+              <a:t> 从 </a:t>
+            </a:r>
+            <a:r>
+              <a:rPr lang="en-US" altLang="zh-CN" sz="1400" i="1" dirty="0"/>
+              <a:t>t</a:t>
+            </a:r>
+            <a:r>
+              <a:rPr lang="zh-CN" altLang="en-US" sz="1400" i="1" dirty="0"/>
+              <a:t> 到 </a:t>
+            </a:r>
+            <a:r>
+              <a:rPr lang="en-US" altLang="zh-CN" sz="1400" i="1" dirty="0"/>
+              <a:t>t+1</a:t>
+            </a:r>
+            <a:r>
+              <a:rPr lang="zh-CN" altLang="en-US" sz="1400" i="1" dirty="0"/>
+              <a:t> 的物体位姿变化</a:t>
+            </a:r>
+          </a:p>
+        </p:txBody>
+      </p:sp>
+      <p:sp>
+        <p:nvSpPr>
+          <p:cNvPr id="13" name="文本框 12">
+            <a:extLst>
+              <a:ext uri="{FF2B5EF4-FFF2-40B4-BE49-F238E27FC236}">
+                <a16:creationId xmlns:a16="http://schemas.microsoft.com/office/drawing/2014/main" id="{B57184FA-CA95-4BB8-757F-EB7457E4EBC6}"/>
+              </a:ext>
+            </a:extLst>
+          </p:cNvPr>
+          <p:cNvSpPr txBox="1"/>
+          <p:nvPr/>
+        </p:nvSpPr>
+        <p:spPr>
+          <a:xfrm>
+            <a:off x="9957322" y="4902542"/>
+            <a:ext cx="1915303" cy="738664"/>
+          </a:xfrm>
+          <a:prstGeom prst="rect">
+            <a:avLst/>
+          </a:prstGeom>
+          <a:noFill/>
+        </p:spPr>
+        <p:txBody>
+          <a:bodyPr wrap="square">
+            <a:spAutoFit/>
+          </a:bodyPr>
+          <a:lstStyle/>
+          <a:p>
+            <a:pPr algn="ctr"/>
+            <a:r>
+              <a:rPr lang="en-US" altLang="zh-CN" sz="1400" i="1" dirty="0"/>
+              <a:t>Gradient Reversal Layer</a:t>
+            </a:r>
+          </a:p>
+          <a:p>
+            <a:pPr algn="ctr"/>
+            <a:r>
+              <a:rPr lang="zh-CN" altLang="en-US" sz="1400" i="1" dirty="0"/>
+              <a:t>前向：输出 </a:t>
+            </a:r>
+            <a:r>
+              <a:rPr lang="en-US" altLang="zh-CN" sz="1400" i="1" dirty="0"/>
+              <a:t>= </a:t>
+            </a:r>
+            <a:r>
+              <a:rPr lang="zh-CN" altLang="en-US" sz="1400" i="1" dirty="0"/>
+              <a:t>输入</a:t>
+            </a:r>
+          </a:p>
+          <a:p>
+            <a:pPr algn="ctr"/>
+            <a:r>
+              <a:rPr lang="zh-CN" altLang="en-US" sz="1400" i="1" dirty="0"/>
+              <a:t>反向：梯度 </a:t>
+            </a:r>
+            <a:r>
+              <a:rPr lang="en-US" altLang="zh-CN" sz="1400" i="1" dirty="0"/>
+              <a:t>× (−0.1)</a:t>
+            </a:r>
+            <a:endParaRPr lang="zh-CN" altLang="en-US" sz="1400" i="1" dirty="0"/>
+          </a:p>
+        </p:txBody>
+      </p:sp>
+      <p:sp>
+        <p:nvSpPr>
+          <p:cNvPr id="16" name="文本框 15">
+            <a:extLst>
+              <a:ext uri="{FF2B5EF4-FFF2-40B4-BE49-F238E27FC236}">
+                <a16:creationId xmlns:a16="http://schemas.microsoft.com/office/drawing/2014/main" id="{3A56EDD3-AAF8-885D-6BE6-BEB36D100279}"/>
+              </a:ext>
+            </a:extLst>
+          </p:cNvPr>
+          <p:cNvSpPr txBox="1"/>
+          <p:nvPr/>
+        </p:nvSpPr>
+        <p:spPr>
+          <a:xfrm>
+            <a:off x="4085223" y="5641206"/>
+            <a:ext cx="1614538" cy="523220"/>
+          </a:xfrm>
+          <a:prstGeom prst="rect">
+            <a:avLst/>
+          </a:prstGeom>
+          <a:noFill/>
+        </p:spPr>
+        <p:txBody>
+          <a:bodyPr wrap="square">
+            <a:spAutoFit/>
+          </a:bodyPr>
+          <a:lstStyle/>
+          <a:p>
+            <a:pPr algn="ctr"/>
+            <a:r>
+              <a:rPr lang="zh-CN" altLang="en-US" sz="1400" i="1" dirty="0"/>
+              <a:t>前段注入：塑造粗粒度的任务级意图</a:t>
+            </a:r>
+          </a:p>
+        </p:txBody>
+      </p:sp>
+      <p:sp>
+        <p:nvSpPr>
+          <p:cNvPr id="18" name="文本框 17">
+            <a:extLst>
+              <a:ext uri="{FF2B5EF4-FFF2-40B4-BE49-F238E27FC236}">
+                <a16:creationId xmlns:a16="http://schemas.microsoft.com/office/drawing/2014/main" id="{88E2D6F8-1A55-D887-682B-B967B477BF86}"/>
+              </a:ext>
+            </a:extLst>
+          </p:cNvPr>
+          <p:cNvSpPr txBox="1"/>
+          <p:nvPr/>
+        </p:nvSpPr>
+        <p:spPr>
+          <a:xfrm>
+            <a:off x="6263453" y="5641206"/>
+            <a:ext cx="1614538" cy="523220"/>
+          </a:xfrm>
+          <a:prstGeom prst="rect">
+            <a:avLst/>
+          </a:prstGeom>
+          <a:noFill/>
+        </p:spPr>
+        <p:txBody>
+          <a:bodyPr wrap="square">
+            <a:spAutoFit/>
+          </a:bodyPr>
+          <a:lstStyle/>
+          <a:p>
+            <a:pPr algn="ctr"/>
+            <a:r>
+              <a:rPr lang="zh-CN" altLang="en-US" sz="1400" i="1" dirty="0"/>
+              <a:t>后段注入：塑造细粒度的动力学补偿</a:t>
+            </a:r>
+          </a:p>
+        </p:txBody>
+      </p:sp>
+      <p:sp>
+        <p:nvSpPr>
+          <p:cNvPr id="19" name="文本框 18">
+            <a:extLst>
+              <a:ext uri="{FF2B5EF4-FFF2-40B4-BE49-F238E27FC236}">
+                <a16:creationId xmlns:a16="http://schemas.microsoft.com/office/drawing/2014/main" id="{40AF31ED-C073-D533-A148-83D731EF50E5}"/>
+              </a:ext>
+            </a:extLst>
+          </p:cNvPr>
+          <p:cNvSpPr txBox="1"/>
+          <p:nvPr/>
+        </p:nvSpPr>
+        <p:spPr>
+          <a:xfrm>
+            <a:off x="-53528" y="3429000"/>
+            <a:ext cx="2263328" cy="523220"/>
+          </a:xfrm>
+          <a:prstGeom prst="rect">
+            <a:avLst/>
+          </a:prstGeom>
+          <a:noFill/>
+        </p:spPr>
+        <p:txBody>
+          <a:bodyPr wrap="square">
+            <a:spAutoFit/>
+          </a:bodyPr>
+          <a:lstStyle/>
+          <a:p>
+            <a:pPr algn="ctr"/>
+            <a:r>
+              <a:rPr lang="en-US" altLang="zh-CN" sz="1400" i="1" dirty="0"/>
+              <a:t>privileged</a:t>
+            </a:r>
+            <a:r>
+              <a:rPr lang="zh-CN" altLang="en-US" sz="1400" i="1" dirty="0"/>
+              <a:t> </a:t>
+            </a:r>
+            <a:r>
+              <a:rPr lang="en-US" altLang="zh-CN" sz="1400" i="1" dirty="0"/>
+              <a:t>critic</a:t>
+            </a:r>
+            <a:r>
+              <a:rPr lang="zh-CN" altLang="en-US" sz="1400" i="1" dirty="0"/>
+              <a:t> </a:t>
+            </a:r>
+            <a:r>
+              <a:rPr lang="en-US" altLang="zh-CN" sz="1400" i="1" dirty="0"/>
+              <a:t>126</a:t>
+            </a:r>
+            <a:r>
+              <a:rPr lang="zh-CN" altLang="en-US" sz="1400" i="1" dirty="0"/>
+              <a:t> </a:t>
+            </a:r>
+            <a:r>
+              <a:rPr lang="en-US" altLang="zh-CN" sz="1400" i="1" dirty="0"/>
+              <a:t>D</a:t>
+            </a:r>
+          </a:p>
+          <a:p>
+            <a:pPr algn="ctr"/>
+            <a:r>
+              <a:rPr lang="en-US" altLang="zh-CN" sz="1400" i="1" dirty="0"/>
+              <a:t>extra</a:t>
+            </a:r>
+            <a:r>
+              <a:rPr lang="zh-CN" altLang="en-US" sz="1400" i="1" dirty="0"/>
+              <a:t> </a:t>
+            </a:r>
+            <a:r>
+              <a:rPr lang="en-US" altLang="zh-CN" sz="1400" i="1" dirty="0"/>
+              <a:t>3D</a:t>
+            </a:r>
+            <a:r>
+              <a:rPr lang="zh-CN" altLang="en-US" sz="1400" i="1" dirty="0"/>
+              <a:t> </a:t>
+            </a:r>
+            <a:r>
+              <a:rPr lang="en-US" altLang="zh-CN" sz="1400" i="1" dirty="0"/>
+              <a:t>base</a:t>
+            </a:r>
+            <a:r>
+              <a:rPr lang="zh-CN" altLang="en-US" sz="1400" i="1" dirty="0"/>
+              <a:t> </a:t>
+            </a:r>
+            <a:r>
+              <a:rPr lang="en-US" altLang="zh-CN" sz="1400" i="1" dirty="0"/>
+              <a:t>linear</a:t>
+            </a:r>
+            <a:r>
+              <a:rPr lang="zh-CN" altLang="en-US" sz="1400" i="1" dirty="0"/>
+              <a:t> </a:t>
+            </a:r>
+            <a:r>
+              <a:rPr lang="en-US" altLang="zh-CN" sz="1400" i="1" dirty="0"/>
+              <a:t>velocity</a:t>
+            </a:r>
+          </a:p>
+        </p:txBody>
+      </p:sp>
     </p:spTree>
     <p:extLst>
       <p:ext uri="{BB962C8B-B14F-4D97-AF65-F5344CB8AC3E}">
@@ -867,7 +2206,79 @@
 </p:sld>
 </file>
 
-<file path=ppt/slides/slide2.xml><?xml version="1.0" encoding="utf-8"?>
+<file path=ppt/slides/slide3.xml><?xml version="1.0" encoding="utf-8"?>
+<p:sld xmlns:a="http://schemas.openxmlformats.org/drawingml/2006/main" xmlns:r="http://schemas.openxmlformats.org/officeDocument/2006/relationships" xmlns:p="http://schemas.openxmlformats.org/presentationml/2006/main">
+  <p:cSld>
+    <p:spTree>
+      <p:nvGrpSpPr>
+        <p:cNvPr id="1" name=""/>
+        <p:cNvGrpSpPr/>
+        <p:nvPr/>
+      </p:nvGrpSpPr>
+      <p:grpSpPr>
+        <a:xfrm>
+          <a:off x="0" y="0"/>
+          <a:ext cx="0" cy="0"/>
+          <a:chOff x="0" y="0"/>
+          <a:chExt cx="0" cy="0"/>
+        </a:xfrm>
+      </p:grpSpPr>
+      <p:pic>
+        <p:nvPicPr>
+          <p:cNvPr id="4" name="图片 3">
+            <a:extLst>
+              <a:ext uri="{FF2B5EF4-FFF2-40B4-BE49-F238E27FC236}">
+                <a16:creationId xmlns:a16="http://schemas.microsoft.com/office/drawing/2014/main" id="{6434E657-A5FF-B2C8-0C2A-8BB072E3569A}"/>
+              </a:ext>
+            </a:extLst>
+          </p:cNvPr>
+          <p:cNvPicPr>
+            <a:picLocks noChangeAspect="1"/>
+          </p:cNvPicPr>
+          <p:nvPr/>
+        </p:nvPicPr>
+        <p:blipFill>
+          <a:blip r:embed="rId2"/>
+          <a:stretch>
+            <a:fillRect/>
+          </a:stretch>
+        </p:blipFill>
+        <p:spPr>
+          <a:xfrm>
+            <a:off x="643467" y="1820502"/>
+            <a:ext cx="10905066" cy="3216995"/>
+          </a:xfrm>
+          <a:prstGeom prst="rect">
+            <a:avLst/>
+          </a:prstGeom>
+        </p:spPr>
+      </p:pic>
+    </p:spTree>
+    <p:extLst>
+      <p:ext uri="{BB962C8B-B14F-4D97-AF65-F5344CB8AC3E}">
+        <p14:creationId xmlns:p14="http://schemas.microsoft.com/office/powerpoint/2010/main" val="3914642122"/>
+      </p:ext>
+    </p:extLst>
+  </p:cSld>
+  <p:clrMapOvr>
+    <a:masterClrMapping/>
+  </p:clrMapOvr>
+  <mc:AlternateContent xmlns:mc="http://schemas.openxmlformats.org/markup-compatibility/2006" xmlns:p14="http://schemas.microsoft.com/office/powerpoint/2010/main">
+    <mc:Choice Requires="p14">
+      <p:transition spd="slow" p14:dur="1250" advClick="0" advTm="0">
+        <p14:prism isContent="1"/>
+      </p:transition>
+    </mc:Choice>
+    <mc:Fallback xmlns="">
+      <p:transition spd="slow" advClick="0" advTm="0">
+        <p:fade/>
+      </p:transition>
+    </mc:Fallback>
+  </mc:AlternateContent>
+</p:sld>
+</file>
+
+<file path=ppt/slides/slide4.xml><?xml version="1.0" encoding="utf-8"?>
 <p:sld xmlns:a="http://schemas.openxmlformats.org/drawingml/2006/main" xmlns:r="http://schemas.openxmlformats.org/officeDocument/2006/relationships" xmlns:p="http://schemas.openxmlformats.org/presentationml/2006/main">
   <p:cSld>
     <p:spTree>
@@ -875,7 +2286,7 @@
         <p:cNvPr id="1" name="">
           <a:extLst>
             <a:ext uri="{FF2B5EF4-FFF2-40B4-BE49-F238E27FC236}">
-              <a16:creationId xmlns:a16="http://schemas.microsoft.com/office/drawing/2014/main" id="{CC78F255-2AB7-0F8C-9AC5-A4C70005EE0A}"/>
+              <a16:creationId xmlns:a16="http://schemas.microsoft.com/office/drawing/2014/main" id="{A1632F90-8E15-D9F3-AA5A-9497B51697D8}"/>
             </a:ext>
           </a:extLst>
         </p:cNvPr>
@@ -890,12 +2301,626 @@
           <a:chExt cx="0" cy="0"/>
         </a:xfrm>
       </p:grpSpPr>
+      <p:sp>
+        <p:nvSpPr>
+          <p:cNvPr id="2" name="矩形 1">
+            <a:extLst>
+              <a:ext uri="{FF2B5EF4-FFF2-40B4-BE49-F238E27FC236}">
+                <a16:creationId xmlns:a16="http://schemas.microsoft.com/office/drawing/2014/main" id="{B9475D00-AA49-A897-D2C0-B4EA41265789}"/>
+              </a:ext>
+            </a:extLst>
+          </p:cNvPr>
+          <p:cNvSpPr/>
+          <p:nvPr/>
+        </p:nvSpPr>
+        <p:spPr>
+          <a:xfrm>
+            <a:off x="5054145" y="33253"/>
+            <a:ext cx="2112501" cy="400110"/>
+          </a:xfrm>
+          <a:prstGeom prst="rect">
+            <a:avLst/>
+          </a:prstGeom>
+        </p:spPr>
+        <p:txBody>
+          <a:bodyPr wrap="none">
+            <a:spAutoFit/>
+          </a:bodyPr>
+          <a:lstStyle/>
+          <a:p>
+            <a:pPr algn="ctr" defTabSz="913765">
+              <a:defRPr/>
+            </a:pPr>
+            <a:r>
+              <a:rPr lang="en-US" altLang="zh-CN" sz="2000" b="1" i="1" dirty="0">
+                <a:solidFill>
+                  <a:prstClr val="black"/>
+                </a:solidFill>
+              </a:rPr>
+              <a:t>Overall Pipeline</a:t>
+            </a:r>
+            <a:endParaRPr lang="en-US" altLang="zh-CN" sz="2000" b="1" dirty="0">
+              <a:solidFill>
+                <a:prstClr val="black"/>
+              </a:solidFill>
+            </a:endParaRPr>
+          </a:p>
+        </p:txBody>
+      </p:sp>
+      <p:sp>
+        <p:nvSpPr>
+          <p:cNvPr id="6" name="文本框 5">
+            <a:extLst>
+              <a:ext uri="{FF2B5EF4-FFF2-40B4-BE49-F238E27FC236}">
+                <a16:creationId xmlns:a16="http://schemas.microsoft.com/office/drawing/2014/main" id="{CD2EC4D3-1753-E1D2-69C1-7DD744730793}"/>
+              </a:ext>
+            </a:extLst>
+          </p:cNvPr>
+          <p:cNvSpPr txBox="1"/>
+          <p:nvPr/>
+        </p:nvSpPr>
+        <p:spPr>
+          <a:xfrm>
+            <a:off x="81456" y="4252175"/>
+            <a:ext cx="2128344" cy="738664"/>
+          </a:xfrm>
+          <a:prstGeom prst="rect">
+            <a:avLst/>
+          </a:prstGeom>
+          <a:noFill/>
+        </p:spPr>
+        <p:txBody>
+          <a:bodyPr wrap="square">
+            <a:spAutoFit/>
+          </a:bodyPr>
+          <a:lstStyle/>
+          <a:p>
+            <a:pPr algn="ctr"/>
+            <a:r>
+              <a:rPr lang="en-US" altLang="zh-CN" sz="1400" i="1" dirty="0"/>
+              <a:t>2</a:t>
+            </a:r>
+            <a:r>
+              <a:rPr lang="zh-CN" altLang="en-US" sz="1400" i="1" dirty="0"/>
+              <a:t>、再训练 </a:t>
+            </a:r>
+            <a:r>
+              <a:rPr lang="en-US" altLang="zh-CN" sz="1400" i="1" dirty="0"/>
+              <a:t>Planner:</a:t>
+            </a:r>
+            <a:r>
+              <a:rPr lang="zh-CN" altLang="en-US" sz="1400" i="1" dirty="0"/>
+              <a:t> 固定 </a:t>
+            </a:r>
+            <a:r>
+              <a:rPr lang="en-US" altLang="zh-CN" sz="1400" i="1" dirty="0"/>
+              <a:t>IDM</a:t>
+            </a:r>
+            <a:r>
+              <a:rPr lang="zh-CN" altLang="en-US" sz="1400" i="1" dirty="0"/>
+              <a:t>，使用监督学习更新 </a:t>
+            </a:r>
+            <a:r>
+              <a:rPr lang="en-US" altLang="zh-CN" sz="1400" i="1" dirty="0"/>
+              <a:t>Planner</a:t>
+            </a:r>
+            <a:r>
+              <a:rPr lang="zh-CN" altLang="en-US" sz="1400" i="1" dirty="0"/>
+              <a:t>，梯度经过 </a:t>
+            </a:r>
+            <a:r>
+              <a:rPr lang="en-US" altLang="zh-CN" sz="1400" i="1" dirty="0"/>
+              <a:t>IDM</a:t>
+            </a:r>
+            <a:endParaRPr lang="zh-CN" altLang="en-US" sz="1400" i="1" dirty="0"/>
+          </a:p>
+        </p:txBody>
+      </p:sp>
+      <p:sp>
+        <p:nvSpPr>
+          <p:cNvPr id="11" name="文本框 10">
+            <a:extLst>
+              <a:ext uri="{FF2B5EF4-FFF2-40B4-BE49-F238E27FC236}">
+                <a16:creationId xmlns:a16="http://schemas.microsoft.com/office/drawing/2014/main" id="{7B3498BD-3FC2-2A41-7220-0106B19710B6}"/>
+              </a:ext>
+            </a:extLst>
+          </p:cNvPr>
+          <p:cNvSpPr txBox="1"/>
+          <p:nvPr/>
+        </p:nvSpPr>
+        <p:spPr>
+          <a:xfrm>
+            <a:off x="81456" y="2924756"/>
+            <a:ext cx="2128344" cy="1169551"/>
+          </a:xfrm>
+          <a:prstGeom prst="rect">
+            <a:avLst/>
+          </a:prstGeom>
+          <a:noFill/>
+        </p:spPr>
+        <p:txBody>
+          <a:bodyPr wrap="square">
+            <a:spAutoFit/>
+          </a:bodyPr>
+          <a:lstStyle/>
+          <a:p>
+            <a:pPr algn="ctr"/>
+            <a:r>
+              <a:rPr lang="en-US" altLang="zh-CN" sz="1400" i="1" dirty="0"/>
+              <a:t>1</a:t>
+            </a:r>
+            <a:r>
+              <a:rPr lang="zh-CN" altLang="en-US" sz="1400" i="1" dirty="0"/>
+              <a:t>、先训练 </a:t>
+            </a:r>
+            <a:r>
+              <a:rPr lang="en-US" altLang="zh-CN" sz="1400" i="1" dirty="0"/>
+              <a:t>IDM</a:t>
+            </a:r>
+            <a:r>
+              <a:rPr lang="zh-CN" altLang="en-US" sz="1400" i="1" dirty="0"/>
+              <a:t> </a:t>
+            </a:r>
+            <a:r>
+              <a:rPr lang="en-US" altLang="zh-CN" sz="1400" i="1" dirty="0"/>
+              <a:t>(</a:t>
+            </a:r>
+            <a:r>
+              <a:rPr lang="zh-CN" altLang="zh-CN" sz="1400" i="1" dirty="0"/>
+              <a:t>Inverse Dynamics Model</a:t>
+            </a:r>
+            <a:r>
+              <a:rPr lang="zh-CN" altLang="en-US" sz="1400" i="1" dirty="0"/>
+              <a:t>，</a:t>
+            </a:r>
+            <a:r>
+              <a:rPr lang="en-US" altLang="zh-CN" sz="1400" i="1" dirty="0"/>
+              <a:t>Encoder-Decoder</a:t>
+            </a:r>
+            <a:r>
+              <a:rPr lang="zh-CN" altLang="en-US" sz="1400" i="1" dirty="0"/>
+              <a:t>架构</a:t>
+            </a:r>
+            <a:r>
+              <a:rPr lang="en-US" altLang="zh-CN" sz="1400" i="1" dirty="0"/>
+              <a:t>):</a:t>
+            </a:r>
+            <a:r>
+              <a:rPr lang="zh-CN" altLang="en-US" sz="1400" i="1" dirty="0"/>
+              <a:t> 使用 </a:t>
+            </a:r>
+            <a:r>
+              <a:rPr lang="en-US" altLang="zh-CN" sz="1400" i="1" dirty="0"/>
+              <a:t>Paired</a:t>
+            </a:r>
+            <a:r>
+              <a:rPr lang="zh-CN" altLang="en-US" sz="1400" i="1" dirty="0"/>
+              <a:t> </a:t>
+            </a:r>
+            <a:r>
+              <a:rPr lang="en-US" altLang="zh-CN" sz="1400" i="1" dirty="0"/>
+              <a:t>State-Action</a:t>
+            </a:r>
+            <a:r>
+              <a:rPr lang="zh-CN" altLang="en-US" sz="1400" i="1" dirty="0"/>
+              <a:t> 和 </a:t>
+            </a:r>
+            <a:r>
+              <a:rPr lang="en-US" altLang="zh-CN" sz="1400" i="1" dirty="0" err="1"/>
+              <a:t>DAgger</a:t>
+            </a:r>
+            <a:r>
+              <a:rPr lang="zh-CN" altLang="en-US" sz="1400" i="1" dirty="0"/>
+              <a:t> 训练 </a:t>
+            </a:r>
+            <a:r>
+              <a:rPr lang="en-US" altLang="zh-CN" sz="1400" i="1" dirty="0"/>
+              <a:t>IDM</a:t>
+            </a:r>
+            <a:endParaRPr lang="zh-CN" altLang="en-US" sz="1400" i="1" dirty="0"/>
+          </a:p>
+        </p:txBody>
+      </p:sp>
+      <p:sp>
+        <p:nvSpPr>
+          <p:cNvPr id="14" name="文本框 13">
+            <a:extLst>
+              <a:ext uri="{FF2B5EF4-FFF2-40B4-BE49-F238E27FC236}">
+                <a16:creationId xmlns:a16="http://schemas.microsoft.com/office/drawing/2014/main" id="{C375DDCD-EA82-E91E-CC17-9639826429DD}"/>
+              </a:ext>
+            </a:extLst>
+          </p:cNvPr>
+          <p:cNvSpPr txBox="1"/>
+          <p:nvPr/>
+        </p:nvSpPr>
+        <p:spPr>
+          <a:xfrm>
+            <a:off x="7941551" y="806060"/>
+            <a:ext cx="1573613" cy="523220"/>
+          </a:xfrm>
+          <a:prstGeom prst="rect">
+            <a:avLst/>
+          </a:prstGeom>
+          <a:noFill/>
+        </p:spPr>
+        <p:txBody>
+          <a:bodyPr wrap="square">
+            <a:spAutoFit/>
+          </a:bodyPr>
+          <a:lstStyle/>
+          <a:p>
+            <a:pPr algn="ctr"/>
+            <a:r>
+              <a:rPr lang="en-US" altLang="zh-CN" sz="1400" i="1" dirty="0"/>
+              <a:t>2</a:t>
+            </a:r>
+            <a:r>
+              <a:rPr lang="zh-CN" altLang="en-US" sz="1400" i="1" dirty="0"/>
+              <a:t> 分钟的真机轨迹，约</a:t>
+            </a:r>
+            <a:r>
+              <a:rPr lang="en-US" altLang="zh-CN" sz="1400" i="1" dirty="0"/>
+              <a:t>6000</a:t>
+            </a:r>
+            <a:r>
+              <a:rPr lang="zh-CN" altLang="en-US" sz="1400" i="1" dirty="0"/>
+              <a:t>个时间步</a:t>
+            </a:r>
+            <a:endParaRPr lang="zh-CN" altLang="en-US" sz="1400" dirty="0"/>
+          </a:p>
+        </p:txBody>
+      </p:sp>
+      <p:sp>
+        <p:nvSpPr>
+          <p:cNvPr id="23" name="文本框 22">
+            <a:extLst>
+              <a:ext uri="{FF2B5EF4-FFF2-40B4-BE49-F238E27FC236}">
+                <a16:creationId xmlns:a16="http://schemas.microsoft.com/office/drawing/2014/main" id="{6A7918A4-CEA3-7403-E921-4A20CF30DFB8}"/>
+              </a:ext>
+            </a:extLst>
+          </p:cNvPr>
+          <p:cNvSpPr txBox="1"/>
+          <p:nvPr/>
+        </p:nvSpPr>
+        <p:spPr>
+          <a:xfrm>
+            <a:off x="4575581" y="5371966"/>
+            <a:ext cx="3951404" cy="954107"/>
+          </a:xfrm>
+          <a:prstGeom prst="rect">
+            <a:avLst/>
+          </a:prstGeom>
+          <a:noFill/>
+        </p:spPr>
+        <p:txBody>
+          <a:bodyPr wrap="square">
+            <a:spAutoFit/>
+          </a:bodyPr>
+          <a:lstStyle/>
+          <a:p>
+            <a:pPr algn="ctr"/>
+            <a:r>
+              <a:rPr lang="zh-CN" altLang="zh-CN" sz="1400" i="1" dirty="0"/>
+              <a:t>Low-Rank Adaptation</a:t>
+            </a:r>
+            <a:r>
+              <a:rPr lang="en-US" altLang="zh-CN" sz="1400" i="1" dirty="0"/>
+              <a:t>:</a:t>
+            </a:r>
+            <a:r>
+              <a:rPr lang="zh-CN" altLang="en-US" sz="1400" i="1" dirty="0"/>
+              <a:t> </a:t>
+            </a:r>
+            <a:r>
+              <a:rPr lang="en-US" altLang="zh-CN" sz="1400" i="1" dirty="0" err="1"/>
+              <a:t>W_new</a:t>
+            </a:r>
+            <a:r>
+              <a:rPr lang="zh-CN" altLang="en-US" sz="1400" i="1" dirty="0"/>
+              <a:t> </a:t>
+            </a:r>
+            <a:r>
+              <a:rPr lang="en-US" altLang="zh-CN" sz="1400" i="1" dirty="0"/>
+              <a:t>=</a:t>
+            </a:r>
+            <a:r>
+              <a:rPr lang="zh-CN" altLang="en-US" sz="1400" i="1" dirty="0"/>
+              <a:t> </a:t>
+            </a:r>
+            <a:r>
+              <a:rPr lang="en-US" altLang="zh-CN" sz="1400" i="1" dirty="0" err="1"/>
+              <a:t>W_old</a:t>
+            </a:r>
+            <a:r>
+              <a:rPr lang="zh-CN" altLang="en-US" sz="1400" i="1" dirty="0"/>
+              <a:t> </a:t>
+            </a:r>
+            <a:r>
+              <a:rPr lang="en-US" altLang="zh-CN" sz="1400" i="1" dirty="0"/>
+              <a:t>+</a:t>
+            </a:r>
+            <a:r>
+              <a:rPr lang="zh-CN" altLang="en-US" sz="1400" i="1" dirty="0"/>
+              <a:t> ∆</a:t>
+            </a:r>
+            <a:r>
+              <a:rPr lang="en-US" altLang="zh-CN" sz="1400" i="1" dirty="0"/>
+              <a:t>W</a:t>
+            </a:r>
+            <a:r>
+              <a:rPr lang="zh-CN" altLang="en-US" sz="1400" i="1" dirty="0"/>
+              <a:t>，∆</a:t>
+            </a:r>
+            <a:r>
+              <a:rPr lang="en-US" altLang="zh-CN" sz="1400" i="1" dirty="0"/>
+              <a:t>W</a:t>
+            </a:r>
+            <a:r>
+              <a:rPr lang="zh-CN" altLang="en-US" sz="1400" i="1" dirty="0"/>
+              <a:t> </a:t>
+            </a:r>
+            <a:r>
+              <a:rPr lang="en-US" altLang="zh-CN" sz="1400" i="1" dirty="0"/>
+              <a:t>=</a:t>
+            </a:r>
+            <a:r>
+              <a:rPr lang="zh-CN" altLang="en-US" sz="1400" i="1" dirty="0"/>
+              <a:t> </a:t>
+            </a:r>
+            <a:r>
+              <a:rPr lang="en-US" altLang="zh-CN" sz="1400" i="1" dirty="0"/>
+              <a:t>B</a:t>
+            </a:r>
+            <a:r>
+              <a:rPr lang="zh-CN" altLang="en-US" sz="1400" i="1" dirty="0"/>
+              <a:t> </a:t>
+            </a:r>
+            <a:r>
+              <a:rPr lang="en-US" altLang="zh-CN" sz="1400" i="1" dirty="0"/>
+              <a:t>x</a:t>
+            </a:r>
+            <a:r>
+              <a:rPr lang="zh-CN" altLang="en-US" sz="1400" i="1" dirty="0"/>
+              <a:t> </a:t>
+            </a:r>
+            <a:r>
+              <a:rPr lang="en-US" altLang="zh-CN" sz="1400" i="1" dirty="0"/>
+              <a:t>A</a:t>
+            </a:r>
+            <a:r>
+              <a:rPr lang="zh-CN" altLang="en-US" sz="1400" i="1" dirty="0"/>
+              <a:t>，</a:t>
+            </a:r>
+            <a:r>
+              <a:rPr lang="en-US" altLang="zh-CN" sz="1400" i="1" dirty="0"/>
+              <a:t>A</a:t>
+            </a:r>
+            <a:r>
+              <a:rPr lang="zh-CN" altLang="en-US" sz="1400" i="1" dirty="0"/>
+              <a:t> 维度是 </a:t>
+            </a:r>
+            <a:r>
+              <a:rPr lang="en-US" altLang="zh-CN" sz="1400" i="1" dirty="0"/>
+              <a:t>r</a:t>
+            </a:r>
+            <a:r>
+              <a:rPr lang="zh-CN" altLang="en-US" sz="1400" i="1" dirty="0"/>
+              <a:t> </a:t>
+            </a:r>
+            <a:r>
+              <a:rPr lang="en-US" altLang="zh-CN" sz="1400" i="1" dirty="0"/>
+              <a:t>x</a:t>
+            </a:r>
+            <a:r>
+              <a:rPr lang="zh-CN" altLang="en-US" sz="1400" i="1" dirty="0"/>
+              <a:t> </a:t>
+            </a:r>
+            <a:r>
+              <a:rPr lang="en-US" altLang="zh-CN" sz="1400" i="1" dirty="0"/>
+              <a:t>d</a:t>
+            </a:r>
+            <a:r>
+              <a:rPr lang="zh-CN" altLang="en-US" sz="1400" i="1" dirty="0"/>
+              <a:t>，</a:t>
+            </a:r>
+            <a:r>
+              <a:rPr lang="en-US" altLang="zh-CN" sz="1400" i="1" dirty="0"/>
+              <a:t>B</a:t>
+            </a:r>
+            <a:r>
+              <a:rPr lang="zh-CN" altLang="en-US" sz="1400" i="1" dirty="0"/>
+              <a:t> 维度是 </a:t>
+            </a:r>
+            <a:r>
+              <a:rPr lang="en-US" altLang="zh-CN" sz="1400" i="1" dirty="0"/>
+              <a:t>d</a:t>
+            </a:r>
+            <a:r>
+              <a:rPr lang="zh-CN" altLang="en-US" sz="1400" i="1" dirty="0"/>
+              <a:t> </a:t>
+            </a:r>
+            <a:r>
+              <a:rPr lang="en-US" altLang="zh-CN" sz="1400" i="1" dirty="0"/>
+              <a:t>x</a:t>
+            </a:r>
+            <a:r>
+              <a:rPr lang="zh-CN" altLang="en-US" sz="1400" i="1" dirty="0"/>
+              <a:t> </a:t>
+            </a:r>
+            <a:r>
+              <a:rPr lang="en-US" altLang="zh-CN" sz="1400" i="1" dirty="0"/>
+              <a:t>r</a:t>
+            </a:r>
+            <a:r>
+              <a:rPr lang="zh-CN" altLang="en-US" sz="1400" i="1" dirty="0"/>
+              <a:t>，即直接固定原网络，外挂新网络 </a:t>
+            </a:r>
+            <a:r>
+              <a:rPr lang="en-US" altLang="zh-CN" sz="1400" i="1" dirty="0"/>
+              <a:t>A</a:t>
+            </a:r>
+            <a:r>
+              <a:rPr lang="zh-CN" altLang="en-US" sz="1400" i="1" dirty="0"/>
+              <a:t> 和 </a:t>
+            </a:r>
+            <a:r>
+              <a:rPr lang="en-US" altLang="zh-CN" sz="1400" i="1" dirty="0"/>
+              <a:t>B</a:t>
+            </a:r>
+            <a:r>
+              <a:rPr lang="zh-CN" altLang="en-US" sz="1400" i="1" dirty="0"/>
+              <a:t>，部署时做 </a:t>
+            </a:r>
+            <a:r>
+              <a:rPr lang="en-US" altLang="zh-CN" sz="1400" i="1" dirty="0" err="1"/>
+              <a:t>W_new</a:t>
+            </a:r>
+            <a:r>
+              <a:rPr lang="zh-CN" altLang="en-US" sz="1400" i="1" dirty="0"/>
+              <a:t> </a:t>
+            </a:r>
+            <a:r>
+              <a:rPr lang="en-US" altLang="zh-CN" sz="1400" i="1" dirty="0"/>
+              <a:t>=</a:t>
+            </a:r>
+            <a:r>
+              <a:rPr lang="zh-CN" altLang="en-US" sz="1400" i="1" dirty="0"/>
+              <a:t> </a:t>
+            </a:r>
+            <a:r>
+              <a:rPr lang="en-US" altLang="zh-CN" sz="1400" i="1" dirty="0" err="1"/>
+              <a:t>W_old</a:t>
+            </a:r>
+            <a:r>
+              <a:rPr lang="zh-CN" altLang="en-US" sz="1400" i="1" dirty="0"/>
+              <a:t> </a:t>
+            </a:r>
+            <a:r>
+              <a:rPr lang="en-US" altLang="zh-CN" sz="1400" i="1" dirty="0"/>
+              <a:t>+</a:t>
+            </a:r>
+            <a:r>
+              <a:rPr lang="zh-CN" altLang="en-US" sz="1400" i="1" dirty="0"/>
+              <a:t> </a:t>
+            </a:r>
+            <a:r>
+              <a:rPr lang="en-US" altLang="zh-CN" sz="1400" i="1" dirty="0"/>
+              <a:t>B</a:t>
+            </a:r>
+            <a:r>
+              <a:rPr lang="zh-CN" altLang="en-US" sz="1400" i="1" dirty="0"/>
+              <a:t> </a:t>
+            </a:r>
+            <a:r>
+              <a:rPr lang="en-US" altLang="zh-CN" sz="1400" i="1" dirty="0"/>
+              <a:t>x</a:t>
+            </a:r>
+            <a:r>
+              <a:rPr lang="zh-CN" altLang="en-US" sz="1400" i="1" dirty="0"/>
+              <a:t> </a:t>
+            </a:r>
+            <a:r>
+              <a:rPr lang="en-US" altLang="zh-CN" sz="1400" i="1" dirty="0"/>
+              <a:t>A</a:t>
+            </a:r>
+          </a:p>
+        </p:txBody>
+      </p:sp>
+      <p:sp>
+        <p:nvSpPr>
+          <p:cNvPr id="24" name="文本框 23">
+            <a:extLst>
+              <a:ext uri="{FF2B5EF4-FFF2-40B4-BE49-F238E27FC236}">
+                <a16:creationId xmlns:a16="http://schemas.microsoft.com/office/drawing/2014/main" id="{E48A7E54-EEEF-97B1-D916-EF8FA1FF5A1F}"/>
+              </a:ext>
+            </a:extLst>
+          </p:cNvPr>
+          <p:cNvSpPr txBox="1"/>
+          <p:nvPr/>
+        </p:nvSpPr>
+        <p:spPr>
+          <a:xfrm>
+            <a:off x="1893177" y="734084"/>
+            <a:ext cx="2596713" cy="523220"/>
+          </a:xfrm>
+          <a:prstGeom prst="rect">
+            <a:avLst/>
+          </a:prstGeom>
+          <a:noFill/>
+        </p:spPr>
+        <p:txBody>
+          <a:bodyPr wrap="square">
+            <a:spAutoFit/>
+          </a:bodyPr>
+          <a:lstStyle/>
+          <a:p>
+            <a:pPr algn="ctr"/>
+            <a:r>
+              <a:rPr lang="zh-CN" altLang="en-US" sz="1400" i="1" dirty="0"/>
+              <a:t>使用纯 </a:t>
+            </a:r>
+            <a:r>
+              <a:rPr lang="en-US" altLang="zh-CN" sz="1400" i="1" dirty="0"/>
+              <a:t>RL</a:t>
+            </a:r>
+            <a:r>
+              <a:rPr lang="zh-CN" altLang="en-US" sz="1400" i="1" dirty="0"/>
+              <a:t> 和 </a:t>
+            </a:r>
+            <a:r>
+              <a:rPr lang="en-US" altLang="zh-CN" sz="1400" i="1" dirty="0"/>
+              <a:t>Task</a:t>
+            </a:r>
+            <a:r>
+              <a:rPr lang="zh-CN" altLang="en-US" sz="1400" i="1" dirty="0"/>
+              <a:t> </a:t>
+            </a:r>
+            <a:r>
+              <a:rPr lang="en-US" altLang="zh-CN" sz="1400" i="1" dirty="0"/>
+              <a:t>Reward</a:t>
+            </a:r>
+            <a:r>
+              <a:rPr lang="zh-CN" altLang="en-US" sz="1400" i="1" dirty="0"/>
+              <a:t> 训练</a:t>
+            </a:r>
+            <a:r>
+              <a:rPr lang="en-US" altLang="zh-CN" sz="1400" i="1" dirty="0"/>
+              <a:t>Locomotion</a:t>
+            </a:r>
+            <a:r>
+              <a:rPr lang="zh-CN" altLang="en-US" sz="1400" i="1" dirty="0"/>
+              <a:t> </a:t>
+            </a:r>
+            <a:r>
+              <a:rPr lang="en-US" altLang="zh-CN" sz="1400" i="1" dirty="0"/>
+              <a:t>Policy</a:t>
+            </a:r>
+            <a:r>
+              <a:rPr lang="zh-CN" altLang="en-US" sz="1400" i="1" dirty="0"/>
+              <a:t> </a:t>
+            </a:r>
+            <a:r>
+              <a:rPr lang="en-US" altLang="zh-CN" sz="1400" i="1" dirty="0"/>
+              <a:t>(</a:t>
+            </a:r>
+            <a:r>
+              <a:rPr lang="zh-CN" altLang="en-US" sz="1400" i="1" dirty="0"/>
+              <a:t>速度跟踪</a:t>
+            </a:r>
+            <a:r>
+              <a:rPr lang="en-US" altLang="zh-CN" sz="1400" i="1" dirty="0"/>
+              <a:t>)</a:t>
+            </a:r>
+            <a:endParaRPr lang="zh-CN" altLang="en-US" sz="1400" i="1" dirty="0"/>
+          </a:p>
+        </p:txBody>
+      </p:sp>
       <p:pic>
         <p:nvPicPr>
-          <p:cNvPr id="2" name="图片 1">
+          <p:cNvPr id="3" name="图片 2">
             <a:extLst>
               <a:ext uri="{FF2B5EF4-FFF2-40B4-BE49-F238E27FC236}">
-                <a16:creationId xmlns:a16="http://schemas.microsoft.com/office/drawing/2014/main" id="{4AB72BE2-6475-2389-1A80-54D747DF98A5}"/>
+                <a16:creationId xmlns:a16="http://schemas.microsoft.com/office/drawing/2014/main" id="{AD195E6D-F459-DA87-1408-539501BD8A86}"/>
               </a:ext>
             </a:extLst>
           </p:cNvPr>
@@ -905,15 +2930,238 @@
           <p:nvPr/>
         </p:nvPicPr>
         <p:blipFill>
-          <a:blip r:embed="rId3"/>
+          <a:blip r:embed="rId2"/>
           <a:stretch>
             <a:fillRect/>
           </a:stretch>
         </p:blipFill>
         <p:spPr>
           <a:xfrm>
-            <a:off x="2209800" y="871230"/>
-            <a:ext cx="7772400" cy="5115539"/>
+            <a:off x="2209800" y="1544782"/>
+            <a:ext cx="7772400" cy="3768436"/>
+          </a:xfrm>
+          <a:prstGeom prst="rect">
+            <a:avLst/>
+          </a:prstGeom>
+        </p:spPr>
+      </p:pic>
+      <p:sp>
+        <p:nvSpPr>
+          <p:cNvPr id="4" name="文本框 3">
+            <a:extLst>
+              <a:ext uri="{FF2B5EF4-FFF2-40B4-BE49-F238E27FC236}">
+                <a16:creationId xmlns:a16="http://schemas.microsoft.com/office/drawing/2014/main" id="{718CFC7C-67BB-B151-00FD-8CD67477787E}"/>
+              </a:ext>
+            </a:extLst>
+          </p:cNvPr>
+          <p:cNvSpPr txBox="1"/>
+          <p:nvPr/>
+        </p:nvSpPr>
+        <p:spPr>
+          <a:xfrm>
+            <a:off x="234097" y="5607870"/>
+            <a:ext cx="4024393" cy="307777"/>
+          </a:xfrm>
+          <a:prstGeom prst="rect">
+            <a:avLst/>
+          </a:prstGeom>
+          <a:noFill/>
+        </p:spPr>
+        <p:txBody>
+          <a:bodyPr wrap="square">
+            <a:spAutoFit/>
+          </a:bodyPr>
+          <a:lstStyle/>
+          <a:p>
+            <a:pPr algn="ctr"/>
+            <a:r>
+              <a:rPr lang="en-US" altLang="zh-CN" sz="1400" i="1" dirty="0" err="1"/>
+              <a:t>State_pred</a:t>
+            </a:r>
+            <a:r>
+              <a:rPr lang="zh-CN" altLang="en-US" sz="1400" i="1" dirty="0"/>
+              <a:t> </a:t>
+            </a:r>
+            <a:r>
+              <a:rPr lang="en-US" altLang="zh-CN" sz="1400" i="1" dirty="0"/>
+              <a:t>-&gt;</a:t>
+            </a:r>
+            <a:r>
+              <a:rPr lang="zh-CN" altLang="en-US" sz="1400" i="1" dirty="0"/>
+              <a:t> </a:t>
+            </a:r>
+            <a:r>
+              <a:rPr lang="en-US" altLang="zh-CN" sz="1400" i="1" dirty="0"/>
+              <a:t>Tracker</a:t>
+            </a:r>
+            <a:r>
+              <a:rPr lang="zh-CN" altLang="en-US" sz="1400" i="1" dirty="0"/>
+              <a:t> </a:t>
+            </a:r>
+            <a:r>
+              <a:rPr lang="en-US" altLang="zh-CN" sz="1400" i="1" dirty="0"/>
+              <a:t>-&gt;</a:t>
+            </a:r>
+            <a:r>
+              <a:rPr lang="zh-CN" altLang="en-US" sz="1400" i="1" dirty="0"/>
+              <a:t> </a:t>
+            </a:r>
+            <a:r>
+              <a:rPr lang="en-US" altLang="zh-CN" sz="1400" i="1" dirty="0"/>
+              <a:t>Action</a:t>
+            </a:r>
+            <a:r>
+              <a:rPr lang="zh-CN" altLang="en-US" sz="1400" i="1" dirty="0"/>
+              <a:t> </a:t>
+            </a:r>
+            <a:r>
+              <a:rPr lang="en-US" altLang="zh-CN" sz="1400" i="1" dirty="0"/>
+              <a:t>-&gt;</a:t>
+            </a:r>
+            <a:r>
+              <a:rPr lang="zh-CN" altLang="en-US" sz="1400" i="1" dirty="0"/>
+              <a:t> </a:t>
+            </a:r>
+            <a:r>
+              <a:rPr lang="en-US" altLang="zh-CN" sz="1400" i="1" dirty="0"/>
+              <a:t>Robot</a:t>
+            </a:r>
+            <a:r>
+              <a:rPr lang="zh-CN" altLang="en-US" sz="1400" i="1" dirty="0"/>
+              <a:t> </a:t>
+            </a:r>
+            <a:r>
+              <a:rPr lang="en-US" altLang="zh-CN" sz="1400" i="1" dirty="0"/>
+              <a:t>-&gt;</a:t>
+            </a:r>
+            <a:r>
+              <a:rPr lang="zh-CN" altLang="en-US" sz="1400" i="1" dirty="0"/>
+              <a:t> </a:t>
+            </a:r>
+            <a:r>
+              <a:rPr lang="en-US" altLang="zh-CN" sz="1400" i="1" dirty="0" err="1"/>
+              <a:t>State_real</a:t>
+            </a:r>
+            <a:endParaRPr lang="zh-CN" altLang="en-US" sz="1400" i="1" dirty="0"/>
+          </a:p>
+        </p:txBody>
+      </p:sp>
+    </p:spTree>
+    <p:extLst>
+      <p:ext uri="{BB962C8B-B14F-4D97-AF65-F5344CB8AC3E}">
+        <p14:creationId xmlns:p14="http://schemas.microsoft.com/office/powerpoint/2010/main" val="1256295014"/>
+      </p:ext>
+    </p:extLst>
+  </p:cSld>
+  <p:clrMapOvr>
+    <a:masterClrMapping/>
+  </p:clrMapOvr>
+  <mc:AlternateContent xmlns:mc="http://schemas.openxmlformats.org/markup-compatibility/2006" xmlns:p14="http://schemas.microsoft.com/office/powerpoint/2010/main">
+    <mc:Choice Requires="p14">
+      <p:transition spd="slow" p14:dur="1250" advClick="0" advTm="0">
+        <p14:prism isContent="1"/>
+      </p:transition>
+    </mc:Choice>
+    <mc:Fallback xmlns="">
+      <p:transition spd="slow" advClick="0" advTm="0">
+        <p:fade/>
+      </p:transition>
+    </mc:Fallback>
+  </mc:AlternateContent>
+</p:sld>
+</file>
+
+<file path=ppt/slides/slide5.xml><?xml version="1.0" encoding="utf-8"?>
+<p:sld xmlns:a="http://schemas.openxmlformats.org/drawingml/2006/main" xmlns:r="http://schemas.openxmlformats.org/officeDocument/2006/relationships" xmlns:p="http://schemas.openxmlformats.org/presentationml/2006/main">
+  <p:cSld>
+    <p:spTree>
+      <p:nvGrpSpPr>
+        <p:cNvPr id="1" name="">
+          <a:extLst>
+            <a:ext uri="{FF2B5EF4-FFF2-40B4-BE49-F238E27FC236}">
+              <a16:creationId xmlns:a16="http://schemas.microsoft.com/office/drawing/2014/main" id="{E227B53D-D73A-C58D-DF21-C1D18BC7BE4D}"/>
+            </a:ext>
+          </a:extLst>
+        </p:cNvPr>
+        <p:cNvGrpSpPr/>
+        <p:nvPr/>
+      </p:nvGrpSpPr>
+      <p:grpSpPr>
+        <a:xfrm>
+          <a:off x="0" y="0"/>
+          <a:ext cx="0" cy="0"/>
+          <a:chOff x="0" y="0"/>
+          <a:chExt cx="0" cy="0"/>
+        </a:xfrm>
+      </p:grpSpPr>
+      <p:sp>
+        <p:nvSpPr>
+          <p:cNvPr id="10" name="矩形 9">
+            <a:extLst>
+              <a:ext uri="{FF2B5EF4-FFF2-40B4-BE49-F238E27FC236}">
+                <a16:creationId xmlns:a16="http://schemas.microsoft.com/office/drawing/2014/main" id="{58B657FD-83AA-00D5-C7CD-C59A30A8CF44}"/>
+              </a:ext>
+            </a:extLst>
+          </p:cNvPr>
+          <p:cNvSpPr/>
+          <p:nvPr/>
+        </p:nvSpPr>
+        <p:spPr>
+          <a:xfrm>
+            <a:off x="4672247" y="0"/>
+            <a:ext cx="2847511" cy="400110"/>
+          </a:xfrm>
+          <a:prstGeom prst="rect">
+            <a:avLst/>
+          </a:prstGeom>
+        </p:spPr>
+        <p:txBody>
+          <a:bodyPr wrap="none">
+            <a:spAutoFit/>
+          </a:bodyPr>
+          <a:lstStyle/>
+          <a:p>
+            <a:pPr algn="ctr"/>
+            <a:r>
+              <a:rPr lang="en-US" altLang="zh-CN" sz="2000" b="1" i="1" dirty="0"/>
+              <a:t>Planner-IDM</a:t>
+            </a:r>
+            <a:r>
+              <a:rPr lang="zh-CN" altLang="en-US" sz="2000" b="1" i="1" dirty="0"/>
+              <a:t> </a:t>
+            </a:r>
+            <a:r>
+              <a:rPr lang="en-US" altLang="zh-CN" sz="2000" b="1" i="1" dirty="0"/>
+              <a:t>Interface</a:t>
+            </a:r>
+            <a:endParaRPr lang="zh-CN" altLang="en-US" sz="2000" b="1" i="1" dirty="0"/>
+          </a:p>
+        </p:txBody>
+      </p:sp>
+      <p:pic>
+        <p:nvPicPr>
+          <p:cNvPr id="3" name="图片 2">
+            <a:extLst>
+              <a:ext uri="{FF2B5EF4-FFF2-40B4-BE49-F238E27FC236}">
+                <a16:creationId xmlns:a16="http://schemas.microsoft.com/office/drawing/2014/main" id="{5E7B36BE-79DA-EC33-76B9-32215ED55903}"/>
+              </a:ext>
+            </a:extLst>
+          </p:cNvPr>
+          <p:cNvPicPr>
+            <a:picLocks noChangeAspect="1"/>
+          </p:cNvPicPr>
+          <p:nvPr/>
+        </p:nvPicPr>
+        <p:blipFill>
+          <a:blip r:embed="rId2"/>
+          <a:stretch>
+            <a:fillRect/>
+          </a:stretch>
+        </p:blipFill>
+        <p:spPr>
+          <a:xfrm>
+            <a:off x="2235857" y="1314232"/>
+            <a:ext cx="7720286" cy="4229535"/>
           </a:xfrm>
           <a:prstGeom prst="rect">
             <a:avLst/>
@@ -923,13 +3171,408 @@
     </p:spTree>
     <p:extLst>
       <p:ext uri="{BB962C8B-B14F-4D97-AF65-F5344CB8AC3E}">
-        <p14:creationId xmlns:p14="http://schemas.microsoft.com/office/powerpoint/2010/main" val="3338831251"/>
+        <p14:creationId xmlns:p14="http://schemas.microsoft.com/office/powerpoint/2010/main" val="2486662702"/>
       </p:ext>
     </p:extLst>
   </p:cSld>
   <p:clrMapOvr>
     <a:masterClrMapping/>
   </p:clrMapOvr>
+  <mc:AlternateContent xmlns:mc="http://schemas.openxmlformats.org/markup-compatibility/2006" xmlns:p14="http://schemas.microsoft.com/office/powerpoint/2010/main">
+    <mc:Choice Requires="p14">
+      <p:transition spd="slow" p14:dur="1250" advClick="0" advTm="0">
+        <p14:prism isContent="1"/>
+      </p:transition>
+    </mc:Choice>
+    <mc:Fallback xmlns="">
+      <p:transition spd="slow" advClick="0" advTm="0">
+        <p:fade/>
+      </p:transition>
+    </mc:Fallback>
+  </mc:AlternateContent>
+</p:sld>
+</file>
+
+<file path=ppt/slides/slide6.xml><?xml version="1.0" encoding="utf-8"?>
+<p:sld xmlns:a="http://schemas.openxmlformats.org/drawingml/2006/main" xmlns:r="http://schemas.openxmlformats.org/officeDocument/2006/relationships" xmlns:p="http://schemas.openxmlformats.org/presentationml/2006/main">
+  <p:cSld>
+    <p:spTree>
+      <p:nvGrpSpPr>
+        <p:cNvPr id="1" name="">
+          <a:extLst>
+            <a:ext uri="{FF2B5EF4-FFF2-40B4-BE49-F238E27FC236}">
+              <a16:creationId xmlns:a16="http://schemas.microsoft.com/office/drawing/2014/main" id="{75009956-8724-72B1-A839-1898676D03DE}"/>
+            </a:ext>
+          </a:extLst>
+        </p:cNvPr>
+        <p:cNvGrpSpPr/>
+        <p:nvPr/>
+      </p:nvGrpSpPr>
+      <p:grpSpPr>
+        <a:xfrm>
+          <a:off x="0" y="0"/>
+          <a:ext cx="0" cy="0"/>
+          <a:chOff x="0" y="0"/>
+          <a:chExt cx="0" cy="0"/>
+        </a:xfrm>
+      </p:grpSpPr>
+      <p:sp>
+        <p:nvSpPr>
+          <p:cNvPr id="10" name="矩形 9">
+            <a:extLst>
+              <a:ext uri="{FF2B5EF4-FFF2-40B4-BE49-F238E27FC236}">
+                <a16:creationId xmlns:a16="http://schemas.microsoft.com/office/drawing/2014/main" id="{72CAB35E-E51D-9528-E917-4527A6895335}"/>
+              </a:ext>
+            </a:extLst>
+          </p:cNvPr>
+          <p:cNvSpPr/>
+          <p:nvPr/>
+        </p:nvSpPr>
+        <p:spPr>
+          <a:xfrm>
+            <a:off x="5067032" y="0"/>
+            <a:ext cx="2057936" cy="400110"/>
+          </a:xfrm>
+          <a:prstGeom prst="rect">
+            <a:avLst/>
+          </a:prstGeom>
+        </p:spPr>
+        <p:txBody>
+          <a:bodyPr wrap="none">
+            <a:spAutoFit/>
+          </a:bodyPr>
+          <a:lstStyle/>
+          <a:p>
+            <a:pPr algn="ctr"/>
+            <a:r>
+              <a:rPr lang="en-US" altLang="zh-CN" sz="2000" b="1" i="1" dirty="0"/>
+              <a:t>Supervised</a:t>
+            </a:r>
+            <a:r>
+              <a:rPr lang="zh-CN" altLang="en-US" sz="2000" b="1" i="1" dirty="0"/>
+              <a:t> </a:t>
+            </a:r>
+            <a:r>
+              <a:rPr lang="en-US" altLang="zh-CN" sz="2000" b="1" i="1" dirty="0"/>
+              <a:t>Loss</a:t>
+            </a:r>
+            <a:endParaRPr lang="zh-CN" altLang="en-US" sz="2000" b="1" i="1" dirty="0"/>
+          </a:p>
+        </p:txBody>
+      </p:sp>
+      <p:pic>
+        <p:nvPicPr>
+          <p:cNvPr id="2" name="图片 1">
+            <a:extLst>
+              <a:ext uri="{FF2B5EF4-FFF2-40B4-BE49-F238E27FC236}">
+                <a16:creationId xmlns:a16="http://schemas.microsoft.com/office/drawing/2014/main" id="{75032C87-CEF7-5671-26B6-2E1F3C0BDF67}"/>
+              </a:ext>
+            </a:extLst>
+          </p:cNvPr>
+          <p:cNvPicPr>
+            <a:picLocks noChangeAspect="1"/>
+          </p:cNvPicPr>
+          <p:nvPr/>
+        </p:nvPicPr>
+        <p:blipFill>
+          <a:blip r:embed="rId2"/>
+          <a:stretch>
+            <a:fillRect/>
+          </a:stretch>
+        </p:blipFill>
+        <p:spPr>
+          <a:xfrm>
+            <a:off x="2325414" y="2822712"/>
+            <a:ext cx="7772400" cy="532715"/>
+          </a:xfrm>
+          <a:prstGeom prst="rect">
+            <a:avLst/>
+          </a:prstGeom>
+        </p:spPr>
+      </p:pic>
+      <p:sp>
+        <p:nvSpPr>
+          <p:cNvPr id="4" name="文本框 3">
+            <a:extLst>
+              <a:ext uri="{FF2B5EF4-FFF2-40B4-BE49-F238E27FC236}">
+                <a16:creationId xmlns:a16="http://schemas.microsoft.com/office/drawing/2014/main" id="{7CFAE47F-910E-4D26-4605-CF90D827EE14}"/>
+              </a:ext>
+            </a:extLst>
+          </p:cNvPr>
+          <p:cNvSpPr txBox="1"/>
+          <p:nvPr/>
+        </p:nvSpPr>
+        <p:spPr>
+          <a:xfrm>
+            <a:off x="6397194" y="3355427"/>
+            <a:ext cx="913354" cy="523220"/>
+          </a:xfrm>
+          <a:prstGeom prst="rect">
+            <a:avLst/>
+          </a:prstGeom>
+          <a:noFill/>
+        </p:spPr>
+        <p:txBody>
+          <a:bodyPr wrap="square">
+            <a:spAutoFit/>
+          </a:bodyPr>
+          <a:lstStyle/>
+          <a:p>
+            <a:pPr algn="ctr"/>
+            <a:r>
+              <a:rPr lang="en-US" altLang="zh-CN" sz="1400" i="1" dirty="0"/>
+              <a:t>H</a:t>
+            </a:r>
+            <a:r>
+              <a:rPr lang="zh-CN" altLang="en-US" sz="1400" i="1" dirty="0"/>
+              <a:t>步历史自我感知</a:t>
+            </a:r>
+            <a:endParaRPr lang="en-US" altLang="zh-CN" sz="1400" i="1" dirty="0"/>
+          </a:p>
+        </p:txBody>
+      </p:sp>
+      <p:sp>
+        <p:nvSpPr>
+          <p:cNvPr id="5" name="文本框 4">
+            <a:extLst>
+              <a:ext uri="{FF2B5EF4-FFF2-40B4-BE49-F238E27FC236}">
+                <a16:creationId xmlns:a16="http://schemas.microsoft.com/office/drawing/2014/main" id="{EE9AF149-CDBD-C9C0-8EDD-382B0BF0BF94}"/>
+              </a:ext>
+            </a:extLst>
+          </p:cNvPr>
+          <p:cNvSpPr txBox="1"/>
+          <p:nvPr/>
+        </p:nvSpPr>
+        <p:spPr>
+          <a:xfrm>
+            <a:off x="7103853" y="2033135"/>
+            <a:ext cx="871232" cy="523220"/>
+          </a:xfrm>
+          <a:prstGeom prst="rect">
+            <a:avLst/>
+          </a:prstGeom>
+          <a:noFill/>
+        </p:spPr>
+        <p:txBody>
+          <a:bodyPr wrap="square">
+            <a:spAutoFit/>
+          </a:bodyPr>
+          <a:lstStyle/>
+          <a:p>
+            <a:pPr algn="ctr"/>
+            <a:r>
+              <a:rPr lang="en-US" altLang="zh-CN" sz="1400" i="1" dirty="0"/>
+              <a:t>H</a:t>
+            </a:r>
+            <a:r>
+              <a:rPr lang="zh-CN" altLang="en-US" sz="1400" i="1" dirty="0"/>
+              <a:t>步历史动作</a:t>
+            </a:r>
+            <a:endParaRPr lang="en-US" altLang="zh-CN" sz="1400" i="1" dirty="0"/>
+          </a:p>
+        </p:txBody>
+      </p:sp>
+      <p:sp>
+        <p:nvSpPr>
+          <p:cNvPr id="6" name="文本框 5">
+            <a:extLst>
+              <a:ext uri="{FF2B5EF4-FFF2-40B4-BE49-F238E27FC236}">
+                <a16:creationId xmlns:a16="http://schemas.microsoft.com/office/drawing/2014/main" id="{226A482F-F440-57E7-FB14-627867B9311E}"/>
+              </a:ext>
+            </a:extLst>
+          </p:cNvPr>
+          <p:cNvSpPr txBox="1"/>
+          <p:nvPr/>
+        </p:nvSpPr>
+        <p:spPr>
+          <a:xfrm>
+            <a:off x="7539469" y="3393379"/>
+            <a:ext cx="1255986" cy="523220"/>
+          </a:xfrm>
+          <a:prstGeom prst="rect">
+            <a:avLst/>
+          </a:prstGeom>
+          <a:noFill/>
+        </p:spPr>
+        <p:txBody>
+          <a:bodyPr wrap="square">
+            <a:spAutoFit/>
+          </a:bodyPr>
+          <a:lstStyle/>
+          <a:p>
+            <a:pPr algn="ctr"/>
+            <a:r>
+              <a:rPr lang="en-US" altLang="zh-CN" sz="1400" i="1" dirty="0"/>
+              <a:t>K</a:t>
+            </a:r>
+            <a:r>
+              <a:rPr lang="zh-CN" altLang="en-US" sz="1400" i="1" dirty="0"/>
+              <a:t>步被记录的未来真机动作</a:t>
+            </a:r>
+            <a:endParaRPr lang="en-US" altLang="zh-CN" sz="1400" i="1" dirty="0"/>
+          </a:p>
+        </p:txBody>
+      </p:sp>
+      <p:sp>
+        <p:nvSpPr>
+          <p:cNvPr id="8" name="文本框 7">
+            <a:extLst>
+              <a:ext uri="{FF2B5EF4-FFF2-40B4-BE49-F238E27FC236}">
+                <a16:creationId xmlns:a16="http://schemas.microsoft.com/office/drawing/2014/main" id="{5475EF9F-E210-4589-ACBD-C334E8701FBC}"/>
+              </a:ext>
+            </a:extLst>
+          </p:cNvPr>
+          <p:cNvSpPr txBox="1"/>
+          <p:nvPr/>
+        </p:nvSpPr>
+        <p:spPr>
+          <a:xfrm>
+            <a:off x="8795455" y="2166314"/>
+            <a:ext cx="1255986" cy="523220"/>
+          </a:xfrm>
+          <a:prstGeom prst="rect">
+            <a:avLst/>
+          </a:prstGeom>
+          <a:noFill/>
+        </p:spPr>
+        <p:txBody>
+          <a:bodyPr wrap="square">
+            <a:spAutoFit/>
+          </a:bodyPr>
+          <a:lstStyle/>
+          <a:p>
+            <a:pPr algn="ctr"/>
+            <a:r>
+              <a:rPr lang="en-US" altLang="zh-CN" sz="1400" i="1" dirty="0"/>
+              <a:t>K</a:t>
+            </a:r>
+            <a:r>
+              <a:rPr lang="zh-CN" altLang="en-US" sz="1400" i="1" dirty="0"/>
+              <a:t>步被记录的未来真机动作</a:t>
+            </a:r>
+            <a:endParaRPr lang="en-US" altLang="zh-CN" sz="1400" i="1" dirty="0"/>
+          </a:p>
+        </p:txBody>
+      </p:sp>
+      <p:sp>
+        <p:nvSpPr>
+          <p:cNvPr id="9" name="文本框 8">
+            <a:extLst>
+              <a:ext uri="{FF2B5EF4-FFF2-40B4-BE49-F238E27FC236}">
+                <a16:creationId xmlns:a16="http://schemas.microsoft.com/office/drawing/2014/main" id="{5D063AAF-2CA8-15D8-7128-308BCF6736DF}"/>
+              </a:ext>
+            </a:extLst>
+          </p:cNvPr>
+          <p:cNvSpPr txBox="1"/>
+          <p:nvPr/>
+        </p:nvSpPr>
+        <p:spPr>
+          <a:xfrm>
+            <a:off x="2831397" y="2307310"/>
+            <a:ext cx="3264603" cy="307777"/>
+          </a:xfrm>
+          <a:prstGeom prst="rect">
+            <a:avLst/>
+          </a:prstGeom>
+          <a:noFill/>
+        </p:spPr>
+        <p:txBody>
+          <a:bodyPr wrap="square">
+            <a:spAutoFit/>
+          </a:bodyPr>
+          <a:lstStyle/>
+          <a:p>
+            <a:pPr algn="ctr"/>
+            <a:r>
+              <a:rPr lang="zh-CN" altLang="en-US" sz="1400" i="1" dirty="0"/>
+              <a:t>均方差：</a:t>
+            </a:r>
+            <a:r>
+              <a:rPr lang="en-US" altLang="zh-CN" sz="1400" i="1" dirty="0"/>
+              <a:t>||Predicted</a:t>
+            </a:r>
+            <a:r>
+              <a:rPr lang="zh-CN" altLang="en-US" sz="1400" i="1" dirty="0"/>
+              <a:t> </a:t>
+            </a:r>
+            <a:r>
+              <a:rPr lang="en-US" altLang="zh-CN" sz="1400" i="1" dirty="0"/>
+              <a:t>–</a:t>
+            </a:r>
+            <a:r>
+              <a:rPr lang="zh-CN" altLang="en-US" sz="1400" i="1" dirty="0"/>
+              <a:t> </a:t>
+            </a:r>
+            <a:r>
+              <a:rPr lang="en-US" altLang="zh-CN" sz="1400" i="1" dirty="0" err="1"/>
+              <a:t>GroundTruth</a:t>
+            </a:r>
+            <a:r>
+              <a:rPr lang="en-US" altLang="zh-CN" sz="1400" i="1" dirty="0"/>
+              <a:t>||^2</a:t>
+            </a:r>
+          </a:p>
+        </p:txBody>
+      </p:sp>
+      <p:sp>
+        <p:nvSpPr>
+          <p:cNvPr id="12" name="文本框 11">
+            <a:extLst>
+              <a:ext uri="{FF2B5EF4-FFF2-40B4-BE49-F238E27FC236}">
+                <a16:creationId xmlns:a16="http://schemas.microsoft.com/office/drawing/2014/main" id="{48F0A556-C34D-BA80-7FAB-7A975C352C72}"/>
+              </a:ext>
+            </a:extLst>
+          </p:cNvPr>
+          <p:cNvSpPr txBox="1"/>
+          <p:nvPr/>
+        </p:nvSpPr>
+        <p:spPr>
+          <a:xfrm>
+            <a:off x="5496306" y="3393379"/>
+            <a:ext cx="786428" cy="523220"/>
+          </a:xfrm>
+          <a:prstGeom prst="rect">
+            <a:avLst/>
+          </a:prstGeom>
+          <a:noFill/>
+        </p:spPr>
+        <p:txBody>
+          <a:bodyPr wrap="square">
+            <a:spAutoFit/>
+          </a:bodyPr>
+          <a:lstStyle/>
+          <a:p>
+            <a:pPr algn="ctr"/>
+            <a:r>
+              <a:rPr lang="zh-CN" altLang="en-US" sz="1400" i="1" dirty="0"/>
+              <a:t>只执行第一步</a:t>
+            </a:r>
+            <a:endParaRPr lang="en-US" altLang="zh-CN" sz="1400" i="1" dirty="0"/>
+          </a:p>
+        </p:txBody>
+      </p:sp>
+    </p:spTree>
+    <p:extLst>
+      <p:ext uri="{BB962C8B-B14F-4D97-AF65-F5344CB8AC3E}">
+        <p14:creationId xmlns:p14="http://schemas.microsoft.com/office/powerpoint/2010/main" val="850006604"/>
+      </p:ext>
+    </p:extLst>
+  </p:cSld>
+  <p:clrMapOvr>
+    <a:masterClrMapping/>
+  </p:clrMapOvr>
+  <mc:AlternateContent xmlns:mc="http://schemas.openxmlformats.org/markup-compatibility/2006" xmlns:p14="http://schemas.microsoft.com/office/powerpoint/2010/main">
+    <mc:Choice Requires="p14">
+      <p:transition spd="slow" p14:dur="1250" advClick="0" advTm="0">
+        <p14:prism isContent="1"/>
+      </p:transition>
+    </mc:Choice>
+    <mc:Fallback xmlns="">
+      <p:transition spd="slow" advClick="0" advTm="0">
+        <p:fade/>
+      </p:transition>
+    </mc:Fallback>
+  </mc:AlternateContent>
 </p:sld>
 </file>
 
